--- a/presentation.pptx
+++ b/presentation.pptx
@@ -5,21 +5,23 @@
     <p:sldMasterId id="2147483648" r:id="rId1"/>
   </p:sldMasterIdLst>
   <p:notesMasterIdLst>
-    <p:notesMasterId r:id="rId14"/>
+    <p:notesMasterId r:id="rId16"/>
   </p:notesMasterIdLst>
   <p:sldIdLst>
     <p:sldId id="256" r:id="rId2"/>
     <p:sldId id="257" r:id="rId3"/>
     <p:sldId id="258" r:id="rId4"/>
-    <p:sldId id="259" r:id="rId5"/>
-    <p:sldId id="260" r:id="rId6"/>
-    <p:sldId id="261" r:id="rId7"/>
-    <p:sldId id="262" r:id="rId8"/>
-    <p:sldId id="263" r:id="rId9"/>
-    <p:sldId id="264" r:id="rId10"/>
-    <p:sldId id="265" r:id="rId11"/>
-    <p:sldId id="266" r:id="rId12"/>
-    <p:sldId id="267" r:id="rId13"/>
+    <p:sldId id="268" r:id="rId5"/>
+    <p:sldId id="269" r:id="rId6"/>
+    <p:sldId id="259" r:id="rId7"/>
+    <p:sldId id="260" r:id="rId8"/>
+    <p:sldId id="261" r:id="rId9"/>
+    <p:sldId id="262" r:id="rId10"/>
+    <p:sldId id="263" r:id="rId11"/>
+    <p:sldId id="264" r:id="rId12"/>
+    <p:sldId id="265" r:id="rId13"/>
+    <p:sldId id="266" r:id="rId14"/>
+    <p:sldId id="267" r:id="rId15"/>
   </p:sldIdLst>
   <p:sldSz cx="12192000" cy="6858000"/>
   <p:notesSz cx="6858000" cy="12192000"/>
@@ -584,6 +586,174 @@
 </p:notes>
 </file>
 
+<file path=ppt/notesSlides/notesSlide13.xml><?xml version="1.0" encoding="utf-8"?>
+<p:notes xmlns:a="http://schemas.openxmlformats.org/drawingml/2006/main" xmlns:r="http://schemas.openxmlformats.org/officeDocument/2006/relationships" xmlns:p="http://schemas.openxmlformats.org/presentationml/2006/main">
+  <p:cSld>
+    <p:spTree>
+      <p:nvGrpSpPr>
+        <p:cNvPr id="1" name=""/>
+        <p:cNvGrpSpPr/>
+        <p:nvPr/>
+      </p:nvGrpSpPr>
+      <p:grpSpPr>
+        <a:xfrm>
+          <a:off x="0" y="0"/>
+          <a:ext cx="0" cy="0"/>
+          <a:chOff x="0" y="0"/>
+          <a:chExt cx="0" cy="0"/>
+        </a:xfrm>
+      </p:grpSpPr>
+      <p:sp>
+        <p:nvSpPr>
+          <p:cNvPr id="2" name="Slide Image Placeholder 1"/>
+          <p:cNvSpPr>
+            <a:spLocks noGrp="1" noRot="1" noChangeAspect="1"/>
+          </p:cNvSpPr>
+          <p:nvPr>
+            <p:ph type="sldImg"/>
+          </p:nvPr>
+        </p:nvSpPr>
+        <p:spPr/>
+      </p:sp>
+      <p:sp>
+        <p:nvSpPr>
+          <p:cNvPr id="3" name="Notes Placeholder 2"/>
+          <p:cNvSpPr>
+            <a:spLocks noGrp="1"/>
+          </p:cNvSpPr>
+          <p:nvPr>
+            <p:ph type="body" idx="1"/>
+          </p:nvPr>
+        </p:nvSpPr>
+        <p:spPr/>
+        <p:txBody>
+          <a:bodyPr/>
+          <a:lstStyle/>
+          <a:p>
+            <a:endParaRPr lang="en-US" dirty="0"/>
+          </a:p>
+        </p:txBody>
+      </p:sp>
+      <p:sp>
+        <p:nvSpPr>
+          <p:cNvPr id="4" name="Slide Number Placeholder 3"/>
+          <p:cNvSpPr>
+            <a:spLocks noGrp="1"/>
+          </p:cNvSpPr>
+          <p:nvPr>
+            <p:ph type="sldNum" sz="quarter" idx="10"/>
+          </p:nvPr>
+        </p:nvSpPr>
+        <p:spPr/>
+        <p:txBody>
+          <a:bodyPr/>
+          <a:lstStyle/>
+          <a:p>
+            <a:fld id="{F7021451-1387-4CA6-816F-3879F97B5CBC}" type="slidenum">
+              <a:rPr lang="en-US"/>
+              <a:t>13</a:t>
+            </a:fld>
+            <a:endParaRPr lang="en-US"/>
+          </a:p>
+        </p:txBody>
+      </p:sp>
+    </p:spTree>
+    <p:extLst>
+      <p:ext uri="{BB962C8B-B14F-4D97-AF65-F5344CB8AC3E}">
+        <p14:creationId xmlns:p14="http://schemas.microsoft.com/office/powerpoint/2010/main" val="1024086991"/>
+      </p:ext>
+    </p:extLst>
+  </p:cSld>
+  <p:clrMapOvr>
+    <a:masterClrMapping/>
+  </p:clrMapOvr>
+</p:notes>
+</file>
+
+<file path=ppt/notesSlides/notesSlide14.xml><?xml version="1.0" encoding="utf-8"?>
+<p:notes xmlns:a="http://schemas.openxmlformats.org/drawingml/2006/main" xmlns:r="http://schemas.openxmlformats.org/officeDocument/2006/relationships" xmlns:p="http://schemas.openxmlformats.org/presentationml/2006/main">
+  <p:cSld>
+    <p:spTree>
+      <p:nvGrpSpPr>
+        <p:cNvPr id="1" name=""/>
+        <p:cNvGrpSpPr/>
+        <p:nvPr/>
+      </p:nvGrpSpPr>
+      <p:grpSpPr>
+        <a:xfrm>
+          <a:off x="0" y="0"/>
+          <a:ext cx="0" cy="0"/>
+          <a:chOff x="0" y="0"/>
+          <a:chExt cx="0" cy="0"/>
+        </a:xfrm>
+      </p:grpSpPr>
+      <p:sp>
+        <p:nvSpPr>
+          <p:cNvPr id="2" name="Slide Image Placeholder 1"/>
+          <p:cNvSpPr>
+            <a:spLocks noGrp="1" noRot="1" noChangeAspect="1"/>
+          </p:cNvSpPr>
+          <p:nvPr>
+            <p:ph type="sldImg"/>
+          </p:nvPr>
+        </p:nvSpPr>
+        <p:spPr/>
+      </p:sp>
+      <p:sp>
+        <p:nvSpPr>
+          <p:cNvPr id="3" name="Notes Placeholder 2"/>
+          <p:cNvSpPr>
+            <a:spLocks noGrp="1"/>
+          </p:cNvSpPr>
+          <p:nvPr>
+            <p:ph type="body" idx="1"/>
+          </p:nvPr>
+        </p:nvSpPr>
+        <p:spPr/>
+        <p:txBody>
+          <a:bodyPr/>
+          <a:lstStyle/>
+          <a:p>
+            <a:endParaRPr lang="en-US" dirty="0"/>
+          </a:p>
+        </p:txBody>
+      </p:sp>
+      <p:sp>
+        <p:nvSpPr>
+          <p:cNvPr id="4" name="Slide Number Placeholder 3"/>
+          <p:cNvSpPr>
+            <a:spLocks noGrp="1"/>
+          </p:cNvSpPr>
+          <p:nvPr>
+            <p:ph type="sldNum" sz="quarter" idx="10"/>
+          </p:nvPr>
+        </p:nvSpPr>
+        <p:spPr/>
+        <p:txBody>
+          <a:bodyPr/>
+          <a:lstStyle/>
+          <a:p>
+            <a:fld id="{F7021451-1387-4CA6-816F-3879F97B5CBC}" type="slidenum">
+              <a:rPr lang="en-US"/>
+              <a:t>14</a:t>
+            </a:fld>
+            <a:endParaRPr lang="en-US"/>
+          </a:p>
+        </p:txBody>
+      </p:sp>
+    </p:spTree>
+    <p:extLst>
+      <p:ext uri="{BB962C8B-B14F-4D97-AF65-F5344CB8AC3E}">
+        <p14:creationId xmlns:p14="http://schemas.microsoft.com/office/powerpoint/2010/main" val="1024086991"/>
+      </p:ext>
+    </p:extLst>
+  </p:cSld>
+  <p:clrMapOvr>
+    <a:masterClrMapping/>
+  </p:clrMapOvr>
+</p:notes>
+</file>
+
 <file path=ppt/notesSlides/notesSlide2.xml><?xml version="1.0" encoding="utf-8"?>
 <p:notes xmlns:a="http://schemas.openxmlformats.org/drawingml/2006/main" xmlns:r="http://schemas.openxmlformats.org/officeDocument/2006/relationships" xmlns:p="http://schemas.openxmlformats.org/presentationml/2006/main">
   <p:cSld>
@@ -757,7 +927,13 @@
   <p:cSld>
     <p:spTree>
       <p:nvGrpSpPr>
-        <p:cNvPr id="1" name=""/>
+        <p:cNvPr id="1" name="">
+          <a:extLst>
+            <a:ext uri="{FF2B5EF4-FFF2-40B4-BE49-F238E27FC236}">
+              <a16:creationId xmlns:a16="http://schemas.microsoft.com/office/drawing/2014/main" id="{54381DD0-FBC3-0BCC-654F-9DBBF3849DA1}"/>
+            </a:ext>
+          </a:extLst>
+        </p:cNvPr>
         <p:cNvGrpSpPr/>
         <p:nvPr/>
       </p:nvGrpSpPr>
@@ -771,7 +947,13 @@
       </p:grpSpPr>
       <p:sp>
         <p:nvSpPr>
-          <p:cNvPr id="2" name="Slide Image Placeholder 1"/>
+          <p:cNvPr id="2" name="Slide Image Placeholder 1">
+            <a:extLst>
+              <a:ext uri="{FF2B5EF4-FFF2-40B4-BE49-F238E27FC236}">
+                <a16:creationId xmlns:a16="http://schemas.microsoft.com/office/drawing/2014/main" id="{2B4E2D80-62D0-73F8-DAE4-F5DE6180431D}"/>
+              </a:ext>
+            </a:extLst>
+          </p:cNvPr>
           <p:cNvSpPr>
             <a:spLocks noGrp="1" noRot="1" noChangeAspect="1"/>
           </p:cNvSpPr>
@@ -783,7 +965,13 @@
       </p:sp>
       <p:sp>
         <p:nvSpPr>
-          <p:cNvPr id="3" name="Notes Placeholder 2"/>
+          <p:cNvPr id="3" name="Notes Placeholder 2">
+            <a:extLst>
+              <a:ext uri="{FF2B5EF4-FFF2-40B4-BE49-F238E27FC236}">
+                <a16:creationId xmlns:a16="http://schemas.microsoft.com/office/drawing/2014/main" id="{854B269C-4D83-AB9F-FCF3-2386C1C2F9DC}"/>
+              </a:ext>
+            </a:extLst>
+          </p:cNvPr>
           <p:cNvSpPr>
             <a:spLocks noGrp="1"/>
           </p:cNvSpPr>
@@ -802,7 +990,13 @@
       </p:sp>
       <p:sp>
         <p:nvSpPr>
-          <p:cNvPr id="4" name="Slide Number Placeholder 3"/>
+          <p:cNvPr id="4" name="Slide Number Placeholder 3">
+            <a:extLst>
+              <a:ext uri="{FF2B5EF4-FFF2-40B4-BE49-F238E27FC236}">
+                <a16:creationId xmlns:a16="http://schemas.microsoft.com/office/drawing/2014/main" id="{EB3FC012-26B6-AA4F-F2FA-F5D9C5F64746}"/>
+              </a:ext>
+            </a:extLst>
+          </p:cNvPr>
           <p:cNvSpPr>
             <a:spLocks noGrp="1"/>
           </p:cNvSpPr>
@@ -826,7 +1020,7 @@
     </p:spTree>
     <p:extLst>
       <p:ext uri="{BB962C8B-B14F-4D97-AF65-F5344CB8AC3E}">
-        <p14:creationId xmlns:p14="http://schemas.microsoft.com/office/powerpoint/2010/main" val="1024086991"/>
+        <p14:creationId xmlns:p14="http://schemas.microsoft.com/office/powerpoint/2010/main" val="745100206"/>
       </p:ext>
     </p:extLst>
   </p:cSld>
@@ -841,7 +1035,13 @@
   <p:cSld>
     <p:spTree>
       <p:nvGrpSpPr>
-        <p:cNvPr id="1" name=""/>
+        <p:cNvPr id="1" name="">
+          <a:extLst>
+            <a:ext uri="{FF2B5EF4-FFF2-40B4-BE49-F238E27FC236}">
+              <a16:creationId xmlns:a16="http://schemas.microsoft.com/office/drawing/2014/main" id="{42F78B57-BECA-3697-FE56-71688DD5AA78}"/>
+            </a:ext>
+          </a:extLst>
+        </p:cNvPr>
         <p:cNvGrpSpPr/>
         <p:nvPr/>
       </p:nvGrpSpPr>
@@ -855,7 +1055,13 @@
       </p:grpSpPr>
       <p:sp>
         <p:nvSpPr>
-          <p:cNvPr id="2" name="Slide Image Placeholder 1"/>
+          <p:cNvPr id="2" name="Slide Image Placeholder 1">
+            <a:extLst>
+              <a:ext uri="{FF2B5EF4-FFF2-40B4-BE49-F238E27FC236}">
+                <a16:creationId xmlns:a16="http://schemas.microsoft.com/office/drawing/2014/main" id="{D66AA5E0-9FD4-3B31-0A01-4B0068B9FD0F}"/>
+              </a:ext>
+            </a:extLst>
+          </p:cNvPr>
           <p:cNvSpPr>
             <a:spLocks noGrp="1" noRot="1" noChangeAspect="1"/>
           </p:cNvSpPr>
@@ -867,7 +1073,13 @@
       </p:sp>
       <p:sp>
         <p:nvSpPr>
-          <p:cNvPr id="3" name="Notes Placeholder 2"/>
+          <p:cNvPr id="3" name="Notes Placeholder 2">
+            <a:extLst>
+              <a:ext uri="{FF2B5EF4-FFF2-40B4-BE49-F238E27FC236}">
+                <a16:creationId xmlns:a16="http://schemas.microsoft.com/office/drawing/2014/main" id="{AE393DEB-17F4-2F3C-8A04-CFA5BE8FA8BC}"/>
+              </a:ext>
+            </a:extLst>
+          </p:cNvPr>
           <p:cNvSpPr>
             <a:spLocks noGrp="1"/>
           </p:cNvSpPr>
@@ -886,7 +1098,13 @@
       </p:sp>
       <p:sp>
         <p:nvSpPr>
-          <p:cNvPr id="4" name="Slide Number Placeholder 3"/>
+          <p:cNvPr id="4" name="Slide Number Placeholder 3">
+            <a:extLst>
+              <a:ext uri="{FF2B5EF4-FFF2-40B4-BE49-F238E27FC236}">
+                <a16:creationId xmlns:a16="http://schemas.microsoft.com/office/drawing/2014/main" id="{481DE09F-BE92-547B-3E31-368361517DA1}"/>
+              </a:ext>
+            </a:extLst>
+          </p:cNvPr>
           <p:cNvSpPr>
             <a:spLocks noGrp="1"/>
           </p:cNvSpPr>
@@ -910,7 +1128,7 @@
     </p:spTree>
     <p:extLst>
       <p:ext uri="{BB962C8B-B14F-4D97-AF65-F5344CB8AC3E}">
-        <p14:creationId xmlns:p14="http://schemas.microsoft.com/office/powerpoint/2010/main" val="1024086991"/>
+        <p14:creationId xmlns:p14="http://schemas.microsoft.com/office/powerpoint/2010/main" val="886897728"/>
       </p:ext>
     </p:extLst>
   </p:cSld>
@@ -1868,6 +2086,917 @@
 
 <file path=ppt/slides/slide10.xml><?xml version="1.0" encoding="utf-8"?>
 <p:sld xmlns:a="http://schemas.openxmlformats.org/drawingml/2006/main" xmlns:r="http://schemas.openxmlformats.org/officeDocument/2006/relationships" xmlns:p="http://schemas.openxmlformats.org/presentationml/2006/main">
+  <p:cSld name="Slide 8">
+    <p:bg>
+      <p:bgPr>
+        <a:solidFill>
+          <a:srgbClr val="FFFFFF"/>
+        </a:solidFill>
+        <a:effectLst/>
+      </p:bgPr>
+    </p:bg>
+    <p:spTree>
+      <p:nvGrpSpPr>
+        <p:cNvPr id="1" name=""/>
+        <p:cNvGrpSpPr/>
+        <p:nvPr/>
+      </p:nvGrpSpPr>
+      <p:grpSpPr>
+        <a:xfrm>
+          <a:off x="0" y="0"/>
+          <a:ext cx="0" cy="0"/>
+          <a:chOff x="0" y="0"/>
+          <a:chExt cx="0" cy="0"/>
+        </a:xfrm>
+      </p:grpSpPr>
+      <p:sp>
+        <p:nvSpPr>
+          <p:cNvPr id="2" name="Shape 0"/>
+          <p:cNvSpPr/>
+          <p:nvPr/>
+        </p:nvSpPr>
+        <p:spPr>
+          <a:xfrm>
+            <a:off x="0" y="0"/>
+            <a:ext cx="12191695" cy="128016"/>
+          </a:xfrm>
+          <a:prstGeom prst="rect">
+            <a:avLst/>
+          </a:prstGeom>
+          <a:solidFill>
+            <a:srgbClr val="2D6F91"/>
+          </a:solidFill>
+          <a:ln w="12700">
+            <a:solidFill>
+              <a:srgbClr val="2D6F91">
+                <a:alpha val="0"/>
+              </a:srgbClr>
+            </a:solidFill>
+            <a:prstDash val="solid"/>
+          </a:ln>
+        </p:spPr>
+      </p:sp>
+      <p:sp>
+        <p:nvSpPr>
+          <p:cNvPr id="3" name="Text 1"/>
+          <p:cNvSpPr/>
+          <p:nvPr/>
+        </p:nvSpPr>
+        <p:spPr>
+          <a:xfrm>
+            <a:off x="502920" y="329184"/>
+            <a:ext cx="5303520" cy="201168"/>
+          </a:xfrm>
+          <a:prstGeom prst="rect">
+            <a:avLst/>
+          </a:prstGeom>
+          <a:noFill/>
+          <a:ln/>
+        </p:spPr>
+        <p:txBody>
+          <a:bodyPr wrap="square" lIns="0" tIns="0" rIns="0" bIns="0" rtlCol="0" anchor="ctr"/>
+          <a:lstStyle/>
+          <a:p>
+            <a:pPr marL="0" indent="0">
+              <a:buNone/>
+            </a:pPr>
+            <a:r>
+              <a:rPr lang="en-US" sz="800" b="1" dirty="0">
+                <a:solidFill>
+                  <a:srgbClr val="2D6F91"/>
+                </a:solidFill>
+                <a:latin typeface="Aptos" pitchFamily="34" charset="0"/>
+                <a:ea typeface="Aptos" pitchFamily="34" charset="-122"/>
+                <a:cs typeface="Aptos" pitchFamily="34" charset="-120"/>
+              </a:rPr>
+              <a:t>09 • ACCURACY–EFFICIENCY TRADE-OFF</a:t>
+            </a:r>
+            <a:endParaRPr lang="en-US" sz="800" dirty="0"/>
+          </a:p>
+        </p:txBody>
+      </p:sp>
+      <p:sp>
+        <p:nvSpPr>
+          <p:cNvPr id="4" name="Text 2"/>
+          <p:cNvSpPr/>
+          <p:nvPr/>
+        </p:nvSpPr>
+        <p:spPr>
+          <a:xfrm>
+            <a:off x="502920" y="658368"/>
+            <a:ext cx="7772400" cy="502920"/>
+          </a:xfrm>
+          <a:prstGeom prst="rect">
+            <a:avLst/>
+          </a:prstGeom>
+          <a:noFill/>
+          <a:ln/>
+        </p:spPr>
+        <p:txBody>
+          <a:bodyPr wrap="square" lIns="0" tIns="0" rIns="0" bIns="0" rtlCol="0" anchor="ctr"/>
+          <a:lstStyle/>
+          <a:p>
+            <a:pPr marL="0" indent="0">
+              <a:buNone/>
+            </a:pPr>
+            <a:r>
+              <a:rPr lang="en-US" sz="2700" b="1" dirty="0">
+                <a:solidFill>
+                  <a:srgbClr val="142033"/>
+                </a:solidFill>
+                <a:latin typeface="Aptos Display" pitchFamily="34" charset="0"/>
+                <a:ea typeface="Aptos Display" pitchFamily="34" charset="-122"/>
+                <a:cs typeface="Aptos Display" pitchFamily="34" charset="-120"/>
+              </a:rPr>
+              <a:t>Why STT-B was worth evaluating</a:t>
+            </a:r>
+            <a:endParaRPr lang="en-US" sz="2700" dirty="0"/>
+          </a:p>
+        </p:txBody>
+      </p:sp>
+      <p:sp>
+        <p:nvSpPr>
+          <p:cNvPr id="5" name="Shape 3"/>
+          <p:cNvSpPr/>
+          <p:nvPr/>
+        </p:nvSpPr>
+        <p:spPr>
+          <a:xfrm>
+            <a:off x="502920" y="1261872"/>
+            <a:ext cx="960120" cy="0"/>
+          </a:xfrm>
+          <a:prstGeom prst="line">
+            <a:avLst/>
+          </a:prstGeom>
+          <a:noFill/>
+          <a:ln w="50800">
+            <a:solidFill>
+              <a:srgbClr val="64A6BD"/>
+            </a:solidFill>
+            <a:prstDash val="solid"/>
+          </a:ln>
+        </p:spPr>
+      </p:sp>
+      <p:pic>
+        <p:nvPicPr>
+          <p:cNvPr id="6" name="Image 0" descr="/mnt/data/cvdl_extract/cv_dl project/stt_vs_sam_iou.png"/>
+          <p:cNvPicPr>
+            <a:picLocks noChangeAspect="1"/>
+          </p:cNvPicPr>
+          <p:nvPr/>
+        </p:nvPicPr>
+        <p:blipFill>
+          <a:blip r:embed="rId3"/>
+          <a:stretch>
+            <a:fillRect/>
+          </a:stretch>
+        </p:blipFill>
+        <p:spPr>
+          <a:xfrm>
+            <a:off x="685800" y="1521823"/>
+            <a:ext cx="4754880" cy="2717074"/>
+          </a:xfrm>
+          <a:prstGeom prst="rect">
+            <a:avLst/>
+          </a:prstGeom>
+        </p:spPr>
+      </p:pic>
+      <p:pic>
+        <p:nvPicPr>
+          <p:cNvPr id="7" name="Image 1" descr="/mnt/data/cvdl_extract/cv_dl project/stt_vs_sam_runtime.png"/>
+          <p:cNvPicPr>
+            <a:picLocks noChangeAspect="1"/>
+          </p:cNvPicPr>
+          <p:nvPr/>
+        </p:nvPicPr>
+        <p:blipFill>
+          <a:blip r:embed="rId4"/>
+          <a:stretch>
+            <a:fillRect/>
+          </a:stretch>
+        </p:blipFill>
+        <p:spPr>
+          <a:xfrm>
+            <a:off x="5806440" y="1521823"/>
+            <a:ext cx="4754880" cy="2717074"/>
+          </a:xfrm>
+          <a:prstGeom prst="rect">
+            <a:avLst/>
+          </a:prstGeom>
+        </p:spPr>
+      </p:pic>
+      <p:sp>
+        <p:nvSpPr>
+          <p:cNvPr id="8" name="Text 4"/>
+          <p:cNvSpPr/>
+          <p:nvPr/>
+        </p:nvSpPr>
+        <p:spPr>
+          <a:xfrm>
+            <a:off x="868680" y="4709160"/>
+            <a:ext cx="2057400" cy="201168"/>
+          </a:xfrm>
+          <a:prstGeom prst="rect">
+            <a:avLst/>
+          </a:prstGeom>
+          <a:noFill/>
+          <a:ln/>
+        </p:spPr>
+        <p:txBody>
+          <a:bodyPr wrap="square" lIns="381" tIns="381" rIns="381" bIns="381" rtlCol="0" anchor="ctr"/>
+          <a:lstStyle/>
+          <a:p>
+            <a:pPr marL="0" indent="0">
+              <a:buNone/>
+            </a:pPr>
+            <a:r>
+              <a:rPr lang="en-US" sz="800" b="1" dirty="0">
+                <a:solidFill>
+                  <a:srgbClr val="5C6B78"/>
+                </a:solidFill>
+                <a:latin typeface="Aptos" pitchFamily="34" charset="0"/>
+                <a:ea typeface="Aptos" pitchFamily="34" charset="-122"/>
+                <a:cs typeface="Aptos" pitchFamily="34" charset="-120"/>
+              </a:rPr>
+              <a:t>STT-B IOU</a:t>
+            </a:r>
+            <a:endParaRPr lang="en-US" sz="800" dirty="0"/>
+          </a:p>
+        </p:txBody>
+      </p:sp>
+      <p:sp>
+        <p:nvSpPr>
+          <p:cNvPr id="9" name="Text 5"/>
+          <p:cNvSpPr/>
+          <p:nvPr/>
+        </p:nvSpPr>
+        <p:spPr>
+          <a:xfrm>
+            <a:off x="868680" y="4937760"/>
+            <a:ext cx="2057400" cy="502920"/>
+          </a:xfrm>
+          <a:prstGeom prst="rect">
+            <a:avLst/>
+          </a:prstGeom>
+          <a:solidFill>
+            <a:srgbClr val="EEF3F7"/>
+          </a:solidFill>
+          <a:ln>
+            <a:solidFill>
+              <a:srgbClr val="D9E2EA">
+                <a:alpha val="80000"/>
+              </a:srgbClr>
+            </a:solidFill>
+          </a:ln>
+        </p:spPr>
+        <p:txBody>
+          <a:bodyPr wrap="square" lIns="635" tIns="635" rIns="635" bIns="635" rtlCol="0" anchor="ctr">
+            <a:normAutofit/>
+          </a:bodyPr>
+          <a:lstStyle/>
+          <a:p>
+            <a:pPr marL="0" indent="0">
+              <a:buNone/>
+            </a:pPr>
+            <a:r>
+              <a:rPr lang="en-US" sz="2300" b="1" dirty="0">
+                <a:solidFill>
+                  <a:srgbClr val="2D6F91"/>
+                </a:solidFill>
+                <a:latin typeface="Aptos Display" pitchFamily="34" charset="0"/>
+                <a:ea typeface="Aptos Display" pitchFamily="34" charset="-122"/>
+                <a:cs typeface="Aptos Display" pitchFamily="34" charset="-120"/>
+              </a:rPr>
+              <a:t>0.631</a:t>
+            </a:r>
+            <a:endParaRPr lang="en-US" sz="2300" dirty="0"/>
+          </a:p>
+        </p:txBody>
+      </p:sp>
+      <p:sp>
+        <p:nvSpPr>
+          <p:cNvPr id="10" name="Text 6"/>
+          <p:cNvSpPr/>
+          <p:nvPr/>
+        </p:nvSpPr>
+        <p:spPr>
+          <a:xfrm>
+            <a:off x="3108960" y="4709160"/>
+            <a:ext cx="2057400" cy="201168"/>
+          </a:xfrm>
+          <a:prstGeom prst="rect">
+            <a:avLst/>
+          </a:prstGeom>
+          <a:noFill/>
+          <a:ln/>
+        </p:spPr>
+        <p:txBody>
+          <a:bodyPr wrap="square" lIns="381" tIns="381" rIns="381" bIns="381" rtlCol="0" anchor="ctr"/>
+          <a:lstStyle/>
+          <a:p>
+            <a:pPr marL="0" indent="0">
+              <a:buNone/>
+            </a:pPr>
+            <a:r>
+              <a:rPr lang="en-US" sz="800" b="1" dirty="0">
+                <a:solidFill>
+                  <a:srgbClr val="5C6B78"/>
+                </a:solidFill>
+                <a:latin typeface="Aptos" pitchFamily="34" charset="0"/>
+                <a:ea typeface="Aptos" pitchFamily="34" charset="-122"/>
+                <a:cs typeface="Aptos" pitchFamily="34" charset="-120"/>
+              </a:rPr>
+              <a:t>SAM IOU</a:t>
+            </a:r>
+            <a:endParaRPr lang="en-US" sz="800" dirty="0"/>
+          </a:p>
+        </p:txBody>
+      </p:sp>
+      <p:sp>
+        <p:nvSpPr>
+          <p:cNvPr id="11" name="Text 7"/>
+          <p:cNvSpPr/>
+          <p:nvPr/>
+        </p:nvSpPr>
+        <p:spPr>
+          <a:xfrm>
+            <a:off x="3108960" y="4937760"/>
+            <a:ext cx="2057400" cy="502920"/>
+          </a:xfrm>
+          <a:prstGeom prst="rect">
+            <a:avLst/>
+          </a:prstGeom>
+          <a:solidFill>
+            <a:srgbClr val="EEF3F7"/>
+          </a:solidFill>
+          <a:ln>
+            <a:solidFill>
+              <a:srgbClr val="D9E2EA">
+                <a:alpha val="80000"/>
+              </a:srgbClr>
+            </a:solidFill>
+          </a:ln>
+        </p:spPr>
+        <p:txBody>
+          <a:bodyPr wrap="square" lIns="635" tIns="635" rIns="635" bIns="635" rtlCol="0" anchor="ctr">
+            <a:normAutofit/>
+          </a:bodyPr>
+          <a:lstStyle/>
+          <a:p>
+            <a:pPr marL="0" indent="0">
+              <a:buNone/>
+            </a:pPr>
+            <a:r>
+              <a:rPr lang="en-US" sz="2300" b="1" dirty="0">
+                <a:solidFill>
+                  <a:srgbClr val="2D6F91"/>
+                </a:solidFill>
+                <a:latin typeface="Aptos Display" pitchFamily="34" charset="0"/>
+                <a:ea typeface="Aptos Display" pitchFamily="34" charset="-122"/>
+                <a:cs typeface="Aptos Display" pitchFamily="34" charset="-120"/>
+              </a:rPr>
+              <a:t>0.672</a:t>
+            </a:r>
+            <a:endParaRPr lang="en-US" sz="2300" dirty="0"/>
+          </a:p>
+        </p:txBody>
+      </p:sp>
+      <p:sp>
+        <p:nvSpPr>
+          <p:cNvPr id="12" name="Text 8"/>
+          <p:cNvSpPr/>
+          <p:nvPr/>
+        </p:nvSpPr>
+        <p:spPr>
+          <a:xfrm>
+            <a:off x="5989320" y="4709160"/>
+            <a:ext cx="2057400" cy="201168"/>
+          </a:xfrm>
+          <a:prstGeom prst="rect">
+            <a:avLst/>
+          </a:prstGeom>
+          <a:noFill/>
+          <a:ln/>
+        </p:spPr>
+        <p:txBody>
+          <a:bodyPr wrap="square" lIns="381" tIns="381" rIns="381" bIns="381" rtlCol="0" anchor="ctr"/>
+          <a:lstStyle/>
+          <a:p>
+            <a:pPr marL="0" indent="0">
+              <a:buNone/>
+            </a:pPr>
+            <a:r>
+              <a:rPr lang="en-US" sz="800" b="1" dirty="0">
+                <a:solidFill>
+                  <a:srgbClr val="5C6B78"/>
+                </a:solidFill>
+                <a:latin typeface="Aptos" pitchFamily="34" charset="0"/>
+                <a:ea typeface="Aptos" pitchFamily="34" charset="-122"/>
+                <a:cs typeface="Aptos" pitchFamily="34" charset="-120"/>
+              </a:rPr>
+              <a:t>STT-B FPS</a:t>
+            </a:r>
+            <a:endParaRPr lang="en-US" sz="800" dirty="0"/>
+          </a:p>
+        </p:txBody>
+      </p:sp>
+      <p:sp>
+        <p:nvSpPr>
+          <p:cNvPr id="13" name="Text 9"/>
+          <p:cNvSpPr/>
+          <p:nvPr/>
+        </p:nvSpPr>
+        <p:spPr>
+          <a:xfrm>
+            <a:off x="5989320" y="4937760"/>
+            <a:ext cx="2057400" cy="502920"/>
+          </a:xfrm>
+          <a:prstGeom prst="rect">
+            <a:avLst/>
+          </a:prstGeom>
+          <a:solidFill>
+            <a:srgbClr val="E7F3EF"/>
+          </a:solidFill>
+          <a:ln>
+            <a:solidFill>
+              <a:srgbClr val="D9E2EA">
+                <a:alpha val="80000"/>
+              </a:srgbClr>
+            </a:solidFill>
+          </a:ln>
+        </p:spPr>
+        <p:txBody>
+          <a:bodyPr wrap="square" lIns="635" tIns="635" rIns="635" bIns="635" rtlCol="0" anchor="ctr">
+            <a:normAutofit/>
+          </a:bodyPr>
+          <a:lstStyle/>
+          <a:p>
+            <a:pPr marL="0" indent="0">
+              <a:buNone/>
+            </a:pPr>
+            <a:r>
+              <a:rPr lang="en-US" sz="2300" b="1" dirty="0">
+                <a:solidFill>
+                  <a:srgbClr val="2D8A68"/>
+                </a:solidFill>
+                <a:latin typeface="Aptos Display" pitchFamily="34" charset="0"/>
+                <a:ea typeface="Aptos Display" pitchFamily="34" charset="-122"/>
+                <a:cs typeface="Aptos Display" pitchFamily="34" charset="-120"/>
+              </a:rPr>
+              <a:t>13.54</a:t>
+            </a:r>
+            <a:endParaRPr lang="en-US" sz="2300" dirty="0"/>
+          </a:p>
+        </p:txBody>
+      </p:sp>
+      <p:sp>
+        <p:nvSpPr>
+          <p:cNvPr id="14" name="Text 10"/>
+          <p:cNvSpPr/>
+          <p:nvPr/>
+        </p:nvSpPr>
+        <p:spPr>
+          <a:xfrm>
+            <a:off x="8229600" y="4709160"/>
+            <a:ext cx="2057400" cy="201168"/>
+          </a:xfrm>
+          <a:prstGeom prst="rect">
+            <a:avLst/>
+          </a:prstGeom>
+          <a:noFill/>
+          <a:ln/>
+        </p:spPr>
+        <p:txBody>
+          <a:bodyPr wrap="square" lIns="381" tIns="381" rIns="381" bIns="381" rtlCol="0" anchor="ctr"/>
+          <a:lstStyle/>
+          <a:p>
+            <a:pPr marL="0" indent="0">
+              <a:buNone/>
+            </a:pPr>
+            <a:r>
+              <a:rPr lang="en-US" sz="800" b="1" dirty="0">
+                <a:solidFill>
+                  <a:srgbClr val="5C6B78"/>
+                </a:solidFill>
+                <a:latin typeface="Aptos" pitchFamily="34" charset="0"/>
+                <a:ea typeface="Aptos" pitchFamily="34" charset="-122"/>
+                <a:cs typeface="Aptos" pitchFamily="34" charset="-120"/>
+              </a:rPr>
+              <a:t>SAM FPS</a:t>
+            </a:r>
+            <a:endParaRPr lang="en-US" sz="800" dirty="0"/>
+          </a:p>
+        </p:txBody>
+      </p:sp>
+      <p:sp>
+        <p:nvSpPr>
+          <p:cNvPr id="15" name="Text 11"/>
+          <p:cNvSpPr/>
+          <p:nvPr/>
+        </p:nvSpPr>
+        <p:spPr>
+          <a:xfrm>
+            <a:off x="8229600" y="4937760"/>
+            <a:ext cx="2057400" cy="502920"/>
+          </a:xfrm>
+          <a:prstGeom prst="rect">
+            <a:avLst/>
+          </a:prstGeom>
+          <a:solidFill>
+            <a:srgbClr val="FFF4E4"/>
+          </a:solidFill>
+          <a:ln>
+            <a:solidFill>
+              <a:srgbClr val="D9E2EA">
+                <a:alpha val="80000"/>
+              </a:srgbClr>
+            </a:solidFill>
+          </a:ln>
+        </p:spPr>
+        <p:txBody>
+          <a:bodyPr wrap="square" lIns="635" tIns="635" rIns="635" bIns="635" rtlCol="0" anchor="ctr">
+            <a:normAutofit/>
+          </a:bodyPr>
+          <a:lstStyle/>
+          <a:p>
+            <a:pPr marL="0" indent="0">
+              <a:buNone/>
+            </a:pPr>
+            <a:r>
+              <a:rPr lang="en-US" sz="2300" b="1" dirty="0">
+                <a:solidFill>
+                  <a:srgbClr val="D69239"/>
+                </a:solidFill>
+                <a:latin typeface="Aptos Display" pitchFamily="34" charset="0"/>
+                <a:ea typeface="Aptos Display" pitchFamily="34" charset="-122"/>
+                <a:cs typeface="Aptos Display" pitchFamily="34" charset="-120"/>
+              </a:rPr>
+              <a:t>2.28</a:t>
+            </a:r>
+            <a:endParaRPr lang="en-US" sz="2300" dirty="0"/>
+          </a:p>
+        </p:txBody>
+      </p:sp>
+      <p:sp>
+        <p:nvSpPr>
+          <p:cNvPr id="16" name="Text 12"/>
+          <p:cNvSpPr/>
+          <p:nvPr/>
+        </p:nvSpPr>
+        <p:spPr>
+          <a:xfrm>
+            <a:off x="868680" y="5879592"/>
+            <a:ext cx="9784080" cy="347472"/>
+          </a:xfrm>
+          <a:prstGeom prst="rect">
+            <a:avLst/>
+          </a:prstGeom>
+          <a:noFill/>
+          <a:ln/>
+        </p:spPr>
+        <p:txBody>
+          <a:bodyPr wrap="square" lIns="635" tIns="635" rIns="635" bIns="635" rtlCol="0" anchor="ctr">
+            <a:normAutofit fontScale="85000" lnSpcReduction="20000"/>
+          </a:bodyPr>
+          <a:lstStyle/>
+          <a:p>
+            <a:pPr marL="0" indent="0">
+              <a:buNone/>
+            </a:pPr>
+            <a:r>
+              <a:rPr lang="en-US" sz="1500" b="1" dirty="0">
+                <a:solidFill>
+                  <a:srgbClr val="142033"/>
+                </a:solidFill>
+                <a:latin typeface="Aptos" pitchFamily="34" charset="0"/>
+                <a:ea typeface="Aptos" pitchFamily="34" charset="-122"/>
+                <a:cs typeface="Aptos" pitchFamily="34" charset="-120"/>
+              </a:rPr>
+              <a:t>SAM is slightly more accurate; STT-B is much faster. This is exactly the project question: not a universal winner, but a useful trade-off.</a:t>
+            </a:r>
+            <a:endParaRPr lang="en-US" sz="1500" dirty="0"/>
+          </a:p>
+        </p:txBody>
+      </p:sp>
+    </p:spTree>
+  </p:cSld>
+  <p:clrMapOvr>
+    <a:masterClrMapping/>
+  </p:clrMapOvr>
+</p:sld>
+</file>
+
+<file path=ppt/slides/slide11.xml><?xml version="1.0" encoding="utf-8"?>
+<p:sld xmlns:a="http://schemas.openxmlformats.org/drawingml/2006/main" xmlns:r="http://schemas.openxmlformats.org/officeDocument/2006/relationships" xmlns:p="http://schemas.openxmlformats.org/presentationml/2006/main">
+  <p:cSld name="Slide 9">
+    <p:bg>
+      <p:bgPr>
+        <a:solidFill>
+          <a:srgbClr val="FFFFFF"/>
+        </a:solidFill>
+        <a:effectLst/>
+      </p:bgPr>
+    </p:bg>
+    <p:spTree>
+      <p:nvGrpSpPr>
+        <p:cNvPr id="1" name=""/>
+        <p:cNvGrpSpPr/>
+        <p:nvPr/>
+      </p:nvGrpSpPr>
+      <p:grpSpPr>
+        <a:xfrm>
+          <a:off x="0" y="0"/>
+          <a:ext cx="0" cy="0"/>
+          <a:chOff x="0" y="0"/>
+          <a:chExt cx="0" cy="0"/>
+        </a:xfrm>
+      </p:grpSpPr>
+      <p:sp>
+        <p:nvSpPr>
+          <p:cNvPr id="2" name="Shape 0"/>
+          <p:cNvSpPr/>
+          <p:nvPr/>
+        </p:nvSpPr>
+        <p:spPr>
+          <a:xfrm>
+            <a:off x="0" y="0"/>
+            <a:ext cx="12191695" cy="128016"/>
+          </a:xfrm>
+          <a:prstGeom prst="rect">
+            <a:avLst/>
+          </a:prstGeom>
+          <a:solidFill>
+            <a:srgbClr val="2D6F91"/>
+          </a:solidFill>
+          <a:ln w="12700">
+            <a:solidFill>
+              <a:srgbClr val="2D6F91">
+                <a:alpha val="0"/>
+              </a:srgbClr>
+            </a:solidFill>
+            <a:prstDash val="solid"/>
+          </a:ln>
+        </p:spPr>
+      </p:sp>
+      <p:sp>
+        <p:nvSpPr>
+          <p:cNvPr id="3" name="Text 1"/>
+          <p:cNvSpPr/>
+          <p:nvPr/>
+        </p:nvSpPr>
+        <p:spPr>
+          <a:xfrm>
+            <a:off x="502920" y="329184"/>
+            <a:ext cx="5303520" cy="201168"/>
+          </a:xfrm>
+          <a:prstGeom prst="rect">
+            <a:avLst/>
+          </a:prstGeom>
+          <a:noFill/>
+          <a:ln/>
+        </p:spPr>
+        <p:txBody>
+          <a:bodyPr wrap="square" lIns="0" tIns="0" rIns="0" bIns="0" rtlCol="0" anchor="ctr"/>
+          <a:lstStyle/>
+          <a:p>
+            <a:pPr marL="0" indent="0">
+              <a:buNone/>
+            </a:pPr>
+            <a:r>
+              <a:rPr lang="en-US" sz="800" b="1" dirty="0">
+                <a:solidFill>
+                  <a:srgbClr val="2D6F91"/>
+                </a:solidFill>
+                <a:latin typeface="Aptos" pitchFamily="34" charset="0"/>
+                <a:ea typeface="Aptos" pitchFamily="34" charset="-122"/>
+                <a:cs typeface="Aptos" pitchFamily="34" charset="-120"/>
+              </a:rPr>
+              <a:t>10 • PROMPT SENSITIVITY</a:t>
+            </a:r>
+            <a:endParaRPr lang="en-US" sz="800" dirty="0"/>
+          </a:p>
+        </p:txBody>
+      </p:sp>
+      <p:sp>
+        <p:nvSpPr>
+          <p:cNvPr id="4" name="Text 2"/>
+          <p:cNvSpPr/>
+          <p:nvPr/>
+        </p:nvSpPr>
+        <p:spPr>
+          <a:xfrm>
+            <a:off x="502920" y="658368"/>
+            <a:ext cx="7772400" cy="502920"/>
+          </a:xfrm>
+          <a:prstGeom prst="rect">
+            <a:avLst/>
+          </a:prstGeom>
+          <a:noFill/>
+          <a:ln/>
+        </p:spPr>
+        <p:txBody>
+          <a:bodyPr wrap="square" lIns="0" tIns="0" rIns="0" bIns="0" rtlCol="0" anchor="ctr"/>
+          <a:lstStyle/>
+          <a:p>
+            <a:pPr marL="0" indent="0">
+              <a:buNone/>
+            </a:pPr>
+            <a:r>
+              <a:rPr lang="en-US" sz="2700" b="1" dirty="0">
+                <a:solidFill>
+                  <a:srgbClr val="142033"/>
+                </a:solidFill>
+                <a:latin typeface="Aptos Display" pitchFamily="34" charset="0"/>
+                <a:ea typeface="Aptos Display" pitchFamily="34" charset="-122"/>
+                <a:cs typeface="Aptos Display" pitchFamily="34" charset="-120"/>
+              </a:rPr>
+              <a:t>The user click is part of the system</a:t>
+            </a:r>
+            <a:endParaRPr lang="en-US" sz="2700" dirty="0"/>
+          </a:p>
+        </p:txBody>
+      </p:sp>
+      <p:sp>
+        <p:nvSpPr>
+          <p:cNvPr id="5" name="Shape 3"/>
+          <p:cNvSpPr/>
+          <p:nvPr/>
+        </p:nvSpPr>
+        <p:spPr>
+          <a:xfrm>
+            <a:off x="502920" y="1261872"/>
+            <a:ext cx="960120" cy="0"/>
+          </a:xfrm>
+          <a:prstGeom prst="line">
+            <a:avLst/>
+          </a:prstGeom>
+          <a:noFill/>
+          <a:ln w="50800">
+            <a:solidFill>
+              <a:srgbClr val="64A6BD"/>
+            </a:solidFill>
+            <a:prstDash val="solid"/>
+          </a:ln>
+        </p:spPr>
+      </p:sp>
+      <p:pic>
+        <p:nvPicPr>
+          <p:cNvPr id="6" name="Image 0" descr="/mnt/data/cvdl_extract/cv_dl project/prompt_robustness_iou.png"/>
+          <p:cNvPicPr>
+            <a:picLocks noChangeAspect="1"/>
+          </p:cNvPicPr>
+          <p:nvPr/>
+        </p:nvPicPr>
+        <p:blipFill>
+          <a:blip r:embed="rId3"/>
+          <a:stretch>
+            <a:fillRect/>
+          </a:stretch>
+        </p:blipFill>
+        <p:spPr>
+          <a:xfrm>
+            <a:off x="731520" y="2034540"/>
+            <a:ext cx="5212080" cy="2606040"/>
+          </a:xfrm>
+          <a:prstGeom prst="rect">
+            <a:avLst/>
+          </a:prstGeom>
+        </p:spPr>
+      </p:pic>
+      <p:sp>
+        <p:nvSpPr>
+          <p:cNvPr id="7" name="Text 4"/>
+          <p:cNvSpPr/>
+          <p:nvPr/>
+        </p:nvSpPr>
+        <p:spPr>
+          <a:xfrm>
+            <a:off x="6492240" y="1737360"/>
+            <a:ext cx="2743200" cy="182880"/>
+          </a:xfrm>
+          <a:prstGeom prst="rect">
+            <a:avLst/>
+          </a:prstGeom>
+          <a:noFill/>
+          <a:ln/>
+        </p:spPr>
+        <p:txBody>
+          <a:bodyPr wrap="square" lIns="0" tIns="0" rIns="0" bIns="0" rtlCol="0" anchor="ctr"/>
+          <a:lstStyle/>
+          <a:p>
+            <a:pPr marL="0" indent="0">
+              <a:buNone/>
+            </a:pPr>
+            <a:r>
+              <a:rPr lang="en-US" sz="800" b="1" dirty="0">
+                <a:solidFill>
+                  <a:srgbClr val="2D6F91"/>
+                </a:solidFill>
+                <a:latin typeface="Aptos" pitchFamily="34" charset="0"/>
+                <a:ea typeface="Aptos" pitchFamily="34" charset="-122"/>
+                <a:cs typeface="Aptos" pitchFamily="34" charset="-120"/>
+              </a:rPr>
+              <a:t>ABLATION RESULT</a:t>
+            </a:r>
+            <a:endParaRPr lang="en-US" sz="800" dirty="0"/>
+          </a:p>
+        </p:txBody>
+      </p:sp>
+      <p:sp>
+        <p:nvSpPr>
+          <p:cNvPr id="8" name="Text 5"/>
+          <p:cNvSpPr/>
+          <p:nvPr/>
+        </p:nvSpPr>
+        <p:spPr>
+          <a:xfrm>
+            <a:off x="6492240" y="2057400"/>
+            <a:ext cx="4206240" cy="1737360"/>
+          </a:xfrm>
+          <a:prstGeom prst="rect">
+            <a:avLst/>
+          </a:prstGeom>
+          <a:noFill/>
+          <a:ln/>
+        </p:spPr>
+        <p:txBody>
+          <a:bodyPr wrap="square" lIns="508" tIns="508" rIns="508" bIns="508" rtlCol="0" anchor="ctr">
+            <a:normAutofit/>
+          </a:bodyPr>
+          <a:lstStyle/>
+          <a:p>
+            <a:pPr marL="0" indent="0">
+              <a:buNone/>
+            </a:pPr>
+            <a:r>
+              <a:rPr lang="en-US" sz="1500" dirty="0">
+                <a:solidFill>
+                  <a:srgbClr val="142033"/>
+                </a:solidFill>
+                <a:latin typeface="Aptos" pitchFamily="34" charset="0"/>
+                <a:ea typeface="Aptos" pitchFamily="34" charset="-122"/>
+                <a:cs typeface="Aptos" pitchFamily="34" charset="-120"/>
+              </a:rPr>
+              <a:t>• Centroid prompt: IoU 0.650 — strongest in this ablation.
+• Deepest interior: 0.616.
+• Random and boundary: ≈0.532 each.
+• Point location materially changes segmentation quality.</a:t>
+            </a:r>
+            <a:endParaRPr lang="en-US" sz="1500" dirty="0"/>
+          </a:p>
+        </p:txBody>
+      </p:sp>
+      <p:sp>
+        <p:nvSpPr>
+          <p:cNvPr id="9" name="Text 6"/>
+          <p:cNvSpPr/>
+          <p:nvPr/>
+        </p:nvSpPr>
+        <p:spPr>
+          <a:xfrm>
+            <a:off x="6492240" y="4663440"/>
+            <a:ext cx="4114800" cy="594360"/>
+          </a:xfrm>
+          <a:prstGeom prst="rect">
+            <a:avLst/>
+          </a:prstGeom>
+          <a:noFill/>
+          <a:ln/>
+        </p:spPr>
+        <p:txBody>
+          <a:bodyPr wrap="square" lIns="635" tIns="635" rIns="635" bIns="635" rtlCol="0" anchor="ctr">
+            <a:normAutofit fontScale="85000" lnSpcReduction="10000"/>
+          </a:bodyPr>
+          <a:lstStyle/>
+          <a:p>
+            <a:pPr marL="0" indent="0">
+              <a:buNone/>
+            </a:pPr>
+            <a:r>
+              <a:rPr lang="en-US" sz="1800" b="1" dirty="0">
+                <a:solidFill>
+                  <a:srgbClr val="142033"/>
+                </a:solidFill>
+                <a:latin typeface="Aptos" pitchFamily="34" charset="0"/>
+                <a:ea typeface="Aptos" pitchFamily="34" charset="-122"/>
+                <a:cs typeface="Aptos" pitchFamily="34" charset="-120"/>
+              </a:rPr>
+              <a:t>Why this belongs in the project: real interactive systems depend on users, not just architecture.</a:t>
+            </a:r>
+            <a:endParaRPr lang="en-US" sz="1800" dirty="0"/>
+          </a:p>
+        </p:txBody>
+      </p:sp>
+    </p:spTree>
+  </p:cSld>
+  <p:clrMapOvr>
+    <a:masterClrMapping/>
+  </p:clrMapOvr>
+</p:sld>
+</file>
+
+<file path=ppt/slides/slide12.xml><?xml version="1.0" encoding="utf-8"?>
+<p:sld xmlns:a="http://schemas.openxmlformats.org/drawingml/2006/main" xmlns:r="http://schemas.openxmlformats.org/officeDocument/2006/relationships" xmlns:p="http://schemas.openxmlformats.org/presentationml/2006/main">
   <p:cSld name="Slide 10">
     <p:bg>
       <p:bgPr>
@@ -1951,7 +3080,7 @@
                 <a:ea typeface="Aptos" pitchFamily="34" charset="-122"/>
                 <a:cs typeface="Aptos" pitchFamily="34" charset="-120"/>
               </a:rPr>
-              <a:t>09 • IMAGE ROBUSTNESS</a:t>
+              <a:t>11 • IMAGE ROBUSTNESS</a:t>
             </a:r>
             <a:endParaRPr lang="en-US" sz="800" dirty="0"/>
           </a:p>
@@ -2175,7 +3304,7 @@
 </p:sld>
 </file>
 
-<file path=ppt/slides/slide11.xml><?xml version="1.0" encoding="utf-8"?>
+<file path=ppt/slides/slide13.xml><?xml version="1.0" encoding="utf-8"?>
 <p:sld xmlns:a="http://schemas.openxmlformats.org/drawingml/2006/main" xmlns:r="http://schemas.openxmlformats.org/officeDocument/2006/relationships" xmlns:p="http://schemas.openxmlformats.org/presentationml/2006/main">
   <p:cSld name="Slide 11">
     <p:bg>
@@ -2260,7 +3389,7 @@
                 <a:ea typeface="Aptos" pitchFamily="34" charset="-122"/>
                 <a:cs typeface="Aptos" pitchFamily="34" charset="-120"/>
               </a:rPr>
-              <a:t>10 • RELIABILITY</a:t>
+              <a:t>12 • RELIABILITY</a:t>
             </a:r>
             <a:endParaRPr lang="en-US" sz="800" dirty="0"/>
           </a:p>
@@ -2849,7 +3978,7 @@
 </p:sld>
 </file>
 
-<file path=ppt/slides/slide12.xml><?xml version="1.0" encoding="utf-8"?>
+<file path=ppt/slides/slide14.xml><?xml version="1.0" encoding="utf-8"?>
 <p:sld xmlns:a="http://schemas.openxmlformats.org/drawingml/2006/main" xmlns:r="http://schemas.openxmlformats.org/officeDocument/2006/relationships" xmlns:p="http://schemas.openxmlformats.org/presentationml/2006/main">
   <p:cSld name="Slide 12">
     <p:bg>
@@ -2882,7 +4011,7 @@
         </p:nvSpPr>
         <p:spPr>
           <a:xfrm>
-            <a:off x="502920" y="329184"/>
+            <a:off x="182880" y="237744"/>
             <a:ext cx="5303520" cy="201168"/>
           </a:xfrm>
           <a:prstGeom prst="rect">
@@ -2907,7 +4036,29 @@
                 <a:ea typeface="Aptos" pitchFamily="34" charset="-122"/>
                 <a:cs typeface="Aptos" pitchFamily="34" charset="-120"/>
               </a:rPr>
-              <a:t>11 • WRAP-UP</a:t>
+              <a:t>13 • </a:t>
+            </a:r>
+            <a:r>
+              <a:rPr lang="en-US" sz="800" b="1" dirty="0" err="1">
+                <a:solidFill>
+                  <a:srgbClr val="B8D9E6"/>
+                </a:solidFill>
+                <a:latin typeface="Aptos" pitchFamily="34" charset="0"/>
+                <a:ea typeface="Aptos" pitchFamily="34" charset="-122"/>
+                <a:cs typeface="Aptos" pitchFamily="34" charset="-120"/>
+              </a:rPr>
+              <a:t>Conlusion</a:t>
+            </a:r>
+            <a:r>
+              <a:rPr lang="en-US" sz="800" b="1" dirty="0">
+                <a:solidFill>
+                  <a:srgbClr val="B8D9E6"/>
+                </a:solidFill>
+                <a:latin typeface="Aptos" pitchFamily="34" charset="0"/>
+                <a:ea typeface="Aptos" pitchFamily="34" charset="-122"/>
+                <a:cs typeface="Aptos" pitchFamily="34" charset="-120"/>
+              </a:rPr>
+              <a:t>  &amp; Future work</a:t>
             </a:r>
             <a:endParaRPr lang="en-US" sz="800" dirty="0"/>
           </a:p>
@@ -2921,8 +4072,8 @@
         </p:nvSpPr>
         <p:spPr>
           <a:xfrm>
-            <a:off x="502920" y="658368"/>
-            <a:ext cx="7772400" cy="502920"/>
+            <a:off x="83976" y="658368"/>
+            <a:ext cx="8191344" cy="502920"/>
           </a:xfrm>
           <a:prstGeom prst="rect">
             <a:avLst/>
@@ -2934,19 +4085,16 @@
           <a:bodyPr wrap="square" lIns="0" tIns="0" rIns="0" bIns="0" rtlCol="0" anchor="ctr"/>
           <a:lstStyle/>
           <a:p>
-            <a:pPr marL="0" indent="0">
-              <a:buNone/>
-            </a:pPr>
-            <a:r>
-              <a:rPr lang="en-US" sz="2700" b="1" dirty="0">
-                <a:solidFill>
-                  <a:srgbClr val="FFFFFF"/>
-                </a:solidFill>
-                <a:latin typeface="Aptos Display" pitchFamily="34" charset="0"/>
-                <a:ea typeface="Aptos Display" pitchFamily="34" charset="-122"/>
-                <a:cs typeface="Aptos Display" pitchFamily="34" charset="-120"/>
-              </a:rPr>
-              <a:t>What this project proves</a:t>
+            <a:r>
+              <a:rPr lang="en-US" sz="2800" b="1">
+                <a:solidFill>
+                  <a:srgbClr val="B8D9E6"/>
+                </a:solidFill>
+                <a:latin typeface="Aptos" pitchFamily="34" charset="0"/>
+                <a:ea typeface="Aptos" pitchFamily="34" charset="-122"/>
+                <a:cs typeface="Aptos" pitchFamily="34" charset="-120"/>
+              </a:rPr>
+              <a:t>Conlusion  &amp; Future work</a:t>
             </a:r>
             <a:endParaRPr lang="en-US" sz="2700" dirty="0"/>
           </a:p>
@@ -2999,28 +4147,48 @@
             <a:pPr marL="0" indent="0">
               <a:buNone/>
             </a:pPr>
-            <a:r>
-              <a:rPr lang="en-US" sz="2000" b="1" dirty="0">
-                <a:solidFill>
-                  <a:srgbClr val="FFFFFF"/>
-                </a:solidFill>
-              </a:rPr>
-              <a:t>Why the choice was justified</a:t>
-            </a:r>
             <a:endParaRPr lang="en-US" sz="2000" dirty="0"/>
           </a:p>
         </p:txBody>
       </p:sp>
       <p:sp>
         <p:nvSpPr>
-          <p:cNvPr id="6" name="Text 4"/>
-          <p:cNvSpPr/>
-          <p:nvPr/>
-        </p:nvSpPr>
-        <p:spPr>
-          <a:xfrm>
-            <a:off x="685800" y="1965960"/>
-            <a:ext cx="5212080" cy="1828800"/>
+          <p:cNvPr id="9" name="Text 7"/>
+          <p:cNvSpPr/>
+          <p:nvPr/>
+        </p:nvSpPr>
+        <p:spPr>
+          <a:xfrm>
+            <a:off x="6492240" y="4114800"/>
+            <a:ext cx="2743200" cy="228600"/>
+          </a:xfrm>
+          <a:prstGeom prst="rect">
+            <a:avLst/>
+          </a:prstGeom>
+          <a:noFill/>
+          <a:ln/>
+        </p:spPr>
+        <p:txBody>
+          <a:bodyPr wrap="square" lIns="0" tIns="0" rIns="0" bIns="0" rtlCol="0" anchor="ctr"/>
+          <a:lstStyle/>
+          <a:p>
+            <a:pPr marL="0" indent="0">
+              <a:buNone/>
+            </a:pPr>
+            <a:endParaRPr lang="en-US" sz="1400" dirty="0"/>
+          </a:p>
+        </p:txBody>
+      </p:sp>
+      <p:sp>
+        <p:nvSpPr>
+          <p:cNvPr id="10" name="Text 8"/>
+          <p:cNvSpPr/>
+          <p:nvPr/>
+        </p:nvSpPr>
+        <p:spPr>
+          <a:xfrm>
+            <a:off x="6492240" y="4462272"/>
+            <a:ext cx="4389120" cy="1097280"/>
           </a:xfrm>
           <a:prstGeom prst="rect">
             <a:avLst/>
@@ -3030,15 +4198,161 @@
         </p:spPr>
         <p:txBody>
           <a:bodyPr wrap="square" lIns="508" tIns="508" rIns="508" bIns="508" rtlCol="0" anchor="ctr">
-            <a:normAutofit lnSpcReduction="10000"/>
+            <a:normAutofit/>
           </a:bodyPr>
           <a:lstStyle/>
           <a:p>
             <a:pPr marL="0" indent="0">
               <a:buNone/>
             </a:pPr>
-            <a:r>
-              <a:rPr lang="en-US" sz="1500" dirty="0">
+            <a:endParaRPr lang="en-US" sz="1400" dirty="0"/>
+          </a:p>
+        </p:txBody>
+      </p:sp>
+      <p:sp>
+        <p:nvSpPr>
+          <p:cNvPr id="11" name="Text 9"/>
+          <p:cNvSpPr/>
+          <p:nvPr/>
+        </p:nvSpPr>
+        <p:spPr>
+          <a:xfrm>
+            <a:off x="685800" y="6190488"/>
+            <a:ext cx="6400800" cy="228600"/>
+          </a:xfrm>
+          <a:prstGeom prst="rect">
+            <a:avLst/>
+          </a:prstGeom>
+          <a:noFill/>
+          <a:ln/>
+        </p:spPr>
+        <p:txBody>
+          <a:bodyPr wrap="square" lIns="0" tIns="0" rIns="0" bIns="0" rtlCol="0" anchor="ctr"/>
+          <a:lstStyle/>
+          <a:p>
+            <a:pPr marL="0" indent="0">
+              <a:buNone/>
+            </a:pPr>
+            <a:r>
+              <a:rPr lang="en-US" sz="1000" dirty="0">
+                <a:solidFill>
+                  <a:srgbClr val="C9DCE8"/>
+                </a:solidFill>
+              </a:rPr>
+              <a:t>Gundeep Singh • Aditya Bakhale • Raghavendra Prasad Shetti</a:t>
+            </a:r>
+            <a:endParaRPr lang="en-US" sz="1000" dirty="0"/>
+          </a:p>
+        </p:txBody>
+      </p:sp>
+      <p:sp>
+        <p:nvSpPr>
+          <p:cNvPr id="12" name="Text 10"/>
+          <p:cNvSpPr/>
+          <p:nvPr/>
+        </p:nvSpPr>
+        <p:spPr>
+          <a:xfrm>
+            <a:off x="411480" y="6510528"/>
+            <a:ext cx="4572000" cy="146304"/>
+          </a:xfrm>
+          <a:prstGeom prst="rect">
+            <a:avLst/>
+          </a:prstGeom>
+          <a:noFill/>
+          <a:ln/>
+        </p:spPr>
+        <p:txBody>
+          <a:bodyPr wrap="square" lIns="0" tIns="0" rIns="0" bIns="0" rtlCol="0" anchor="ctr"/>
+          <a:lstStyle/>
+          <a:p>
+            <a:pPr marL="0" indent="0">
+              <a:buNone/>
+            </a:pPr>
+            <a:endParaRPr lang="en-US" sz="700" dirty="0"/>
+          </a:p>
+        </p:txBody>
+      </p:sp>
+      <p:sp>
+        <p:nvSpPr>
+          <p:cNvPr id="13" name="TextBox 12">
+            <a:extLst>
+              <a:ext uri="{FF2B5EF4-FFF2-40B4-BE49-F238E27FC236}">
+                <a16:creationId xmlns:a16="http://schemas.microsoft.com/office/drawing/2014/main" id="{FABE0D73-DA38-749C-99DE-8CE9AF5D6637}"/>
+              </a:ext>
+            </a:extLst>
+          </p:cNvPr>
+          <p:cNvSpPr txBox="1"/>
+          <p:nvPr/>
+        </p:nvSpPr>
+        <p:spPr>
+          <a:xfrm>
+            <a:off x="502920" y="1706355"/>
+            <a:ext cx="2660158" cy="369332"/>
+          </a:xfrm>
+          <a:prstGeom prst="rect">
+            <a:avLst/>
+          </a:prstGeom>
+          <a:noFill/>
+        </p:spPr>
+        <p:txBody>
+          <a:bodyPr wrap="square" rtlCol="0">
+            <a:spAutoFit/>
+          </a:bodyPr>
+          <a:lstStyle/>
+          <a:p>
+            <a:r>
+              <a:rPr lang="en-US" b="1" dirty="0">
+                <a:solidFill>
+                  <a:schemeClr val="accent5">
+                    <a:lumMod val="60000"/>
+                    <a:lumOff val="40000"/>
+                  </a:schemeClr>
+                </a:solidFill>
+              </a:rPr>
+              <a:t>Final conclusion</a:t>
+            </a:r>
+            <a:endParaRPr lang="en-US" dirty="0">
+              <a:solidFill>
+                <a:schemeClr val="accent5">
+                  <a:lumMod val="60000"/>
+                  <a:lumOff val="40000"/>
+                </a:schemeClr>
+              </a:solidFill>
+            </a:endParaRPr>
+          </a:p>
+        </p:txBody>
+      </p:sp>
+      <p:sp>
+        <p:nvSpPr>
+          <p:cNvPr id="14" name="TextBox 13">
+            <a:extLst>
+              <a:ext uri="{FF2B5EF4-FFF2-40B4-BE49-F238E27FC236}">
+                <a16:creationId xmlns:a16="http://schemas.microsoft.com/office/drawing/2014/main" id="{78701B91-D2D2-DBE7-39F9-95C2EFC34263}"/>
+              </a:ext>
+            </a:extLst>
+          </p:cNvPr>
+          <p:cNvSpPr txBox="1"/>
+          <p:nvPr/>
+        </p:nvSpPr>
+        <p:spPr>
+          <a:xfrm>
+            <a:off x="411481" y="2075687"/>
+            <a:ext cx="3880602" cy="1754326"/>
+          </a:xfrm>
+          <a:prstGeom prst="rect">
+            <a:avLst/>
+          </a:prstGeom>
+          <a:noFill/>
+        </p:spPr>
+        <p:txBody>
+          <a:bodyPr wrap="square" rtlCol="0">
+            <a:spAutoFit/>
+          </a:bodyPr>
+          <a:lstStyle/>
+          <a:p>
+            <a:r>
+              <a:rPr lang="en-US" b="1" dirty="0">
                 <a:solidFill>
                   <a:srgbClr val="FFFFFF"/>
                 </a:solidFill>
@@ -3046,233 +4360,123 @@
                 <a:ea typeface="Aptos" pitchFamily="34" charset="-122"/>
                 <a:cs typeface="Aptos" pitchFamily="34" charset="-120"/>
               </a:rPr>
-              <a:t>• It connects a current CVPR model to a practical interactive problem.
-• It gives a clear measurable trade-off: STT-B is faster; SAM is somewhat more accurate.
-• It creates room for real analysis: prompts, degradations, confidence and failures.
-• It extends masks into object measurements rather than stopping at IoU.</a:t>
-            </a:r>
-            <a:endParaRPr lang="en-US" sz="1500" dirty="0"/>
-          </a:p>
-        </p:txBody>
-      </p:sp>
-      <p:sp>
-        <p:nvSpPr>
-          <p:cNvPr id="7" name="Text 5"/>
-          <p:cNvSpPr/>
-          <p:nvPr/>
-        </p:nvSpPr>
-        <p:spPr>
-          <a:xfrm>
-            <a:off x="6492240" y="1508760"/>
-            <a:ext cx="4389120" cy="320040"/>
-          </a:xfrm>
-          <a:prstGeom prst="rect">
-            <a:avLst/>
-          </a:prstGeom>
-          <a:noFill/>
-          <a:ln/>
-        </p:spPr>
-        <p:txBody>
-          <a:bodyPr wrap="square" lIns="0" tIns="0" rIns="0" bIns="0" rtlCol="0" anchor="ctr"/>
-          <a:lstStyle/>
-          <a:p>
-            <a:pPr marL="0" indent="0">
-              <a:buNone/>
-            </a:pPr>
-            <a:r>
-              <a:rPr lang="en-US" sz="2000" b="1" dirty="0">
-                <a:solidFill>
-                  <a:srgbClr val="B8D9E6"/>
-                </a:solidFill>
-              </a:rPr>
-              <a:t>Final conclusion</a:t>
-            </a:r>
-            <a:endParaRPr lang="en-US" sz="2000" dirty="0"/>
-          </a:p>
-        </p:txBody>
-      </p:sp>
-      <p:sp>
-        <p:nvSpPr>
-          <p:cNvPr id="8" name="Text 6"/>
-          <p:cNvSpPr/>
-          <p:nvPr/>
-        </p:nvSpPr>
-        <p:spPr>
-          <a:xfrm>
-            <a:off x="6492240" y="1965960"/>
-            <a:ext cx="4434840" cy="1371600"/>
-          </a:xfrm>
-          <a:prstGeom prst="rect">
-            <a:avLst/>
-          </a:prstGeom>
-          <a:noFill/>
-          <a:ln/>
-        </p:spPr>
-        <p:txBody>
-          <a:bodyPr wrap="square" lIns="635" tIns="635" rIns="635" bIns="635" rtlCol="0" anchor="ctr">
-            <a:normAutofit fontScale="85000" lnSpcReduction="20000"/>
+              <a:t>STT-B is a strong efficiency-focused segmentation model for fast point-prompted interaction. It is not pixel-perfect, but it is useful when speed, simplicity and interpretable failure analysis matter.</a:t>
+            </a:r>
+            <a:endParaRPr lang="en-US" dirty="0"/>
+          </a:p>
+        </p:txBody>
+      </p:sp>
+      <p:sp>
+        <p:nvSpPr>
+          <p:cNvPr id="15" name="TextBox 14">
+            <a:extLst>
+              <a:ext uri="{FF2B5EF4-FFF2-40B4-BE49-F238E27FC236}">
+                <a16:creationId xmlns:a16="http://schemas.microsoft.com/office/drawing/2014/main" id="{005C0074-39B7-0441-6F9F-ECA35058C7F5}"/>
+              </a:ext>
+            </a:extLst>
+          </p:cNvPr>
+          <p:cNvSpPr txBox="1"/>
+          <p:nvPr/>
+        </p:nvSpPr>
+        <p:spPr>
+          <a:xfrm>
+            <a:off x="6615405" y="1452107"/>
+            <a:ext cx="1575560" cy="369332"/>
+          </a:xfrm>
+          <a:prstGeom prst="rect">
+            <a:avLst/>
+          </a:prstGeom>
+          <a:noFill/>
+        </p:spPr>
+        <p:txBody>
+          <a:bodyPr wrap="none" rtlCol="0">
+            <a:spAutoFit/>
           </a:bodyPr>
           <a:lstStyle/>
           <a:p>
-            <a:pPr marL="0" indent="0">
-              <a:buNone/>
-            </a:pPr>
-            <a:r>
-              <a:rPr lang="en-US" sz="2100" b="1" dirty="0">
-                <a:solidFill>
-                  <a:srgbClr val="FFFFFF"/>
-                </a:solidFill>
-                <a:latin typeface="Aptos" pitchFamily="34" charset="0"/>
-                <a:ea typeface="Aptos" pitchFamily="34" charset="-122"/>
-                <a:cs typeface="Aptos" pitchFamily="34" charset="-120"/>
-              </a:rPr>
-              <a:t>STT-B is a strong efficiency-focused segmentation model for fast point-prompted interaction. It is not pixel-perfect, but it is useful when speed, simplicity and interpretable failure analysis matter.</a:t>
-            </a:r>
-            <a:endParaRPr lang="en-US" sz="2100" dirty="0"/>
-          </a:p>
-        </p:txBody>
-      </p:sp>
-      <p:sp>
-        <p:nvSpPr>
-          <p:cNvPr id="9" name="Text 7"/>
-          <p:cNvSpPr/>
-          <p:nvPr/>
-        </p:nvSpPr>
-        <p:spPr>
-          <a:xfrm>
-            <a:off x="6492240" y="4114800"/>
-            <a:ext cx="2743200" cy="228600"/>
-          </a:xfrm>
-          <a:prstGeom prst="rect">
-            <a:avLst/>
-          </a:prstGeom>
-          <a:noFill/>
-          <a:ln/>
-        </p:spPr>
-        <p:txBody>
-          <a:bodyPr wrap="square" lIns="0" tIns="0" rIns="0" bIns="0" rtlCol="0" anchor="ctr"/>
-          <a:lstStyle/>
-          <a:p>
-            <a:pPr marL="0" indent="0">
-              <a:buNone/>
-            </a:pPr>
-            <a:r>
-              <a:rPr lang="en-US" sz="1400" b="1" dirty="0">
-                <a:solidFill>
-                  <a:srgbClr val="B8D9E6"/>
-                </a:solidFill>
-              </a:rPr>
-              <a:t>Next steps</a:t>
-            </a:r>
-            <a:endParaRPr lang="en-US" sz="1400" dirty="0"/>
-          </a:p>
-        </p:txBody>
-      </p:sp>
-      <p:sp>
-        <p:nvSpPr>
-          <p:cNvPr id="10" name="Text 8"/>
-          <p:cNvSpPr/>
-          <p:nvPr/>
-        </p:nvSpPr>
-        <p:spPr>
-          <a:xfrm>
-            <a:off x="6492240" y="4462272"/>
-            <a:ext cx="4389120" cy="1097280"/>
-          </a:xfrm>
-          <a:prstGeom prst="rect">
-            <a:avLst/>
-          </a:prstGeom>
-          <a:noFill/>
-          <a:ln/>
-        </p:spPr>
-        <p:txBody>
-          <a:bodyPr wrap="square" lIns="508" tIns="508" rIns="508" bIns="508" rtlCol="0" anchor="ctr">
-            <a:normAutofit/>
+            <a:r>
+              <a:rPr lang="en-GB" b="1" dirty="0">
+                <a:solidFill>
+                  <a:schemeClr val="accent1">
+                    <a:lumMod val="60000"/>
+                    <a:lumOff val="40000"/>
+                  </a:schemeClr>
+                </a:solidFill>
+              </a:rPr>
+              <a:t>Future Scope</a:t>
+            </a:r>
+            <a:endParaRPr lang="en-IN" b="1" dirty="0">
+              <a:solidFill>
+                <a:schemeClr val="accent1">
+                  <a:lumMod val="60000"/>
+                  <a:lumOff val="40000"/>
+                </a:schemeClr>
+              </a:solidFill>
+            </a:endParaRPr>
+          </a:p>
+        </p:txBody>
+      </p:sp>
+      <p:sp>
+        <p:nvSpPr>
+          <p:cNvPr id="16" name="TextBox 15">
+            <a:extLst>
+              <a:ext uri="{FF2B5EF4-FFF2-40B4-BE49-F238E27FC236}">
+                <a16:creationId xmlns:a16="http://schemas.microsoft.com/office/drawing/2014/main" id="{7256E61A-6A3C-E7BB-30B6-3D34B537F055}"/>
+              </a:ext>
+            </a:extLst>
+          </p:cNvPr>
+          <p:cNvSpPr txBox="1"/>
+          <p:nvPr/>
+        </p:nvSpPr>
+        <p:spPr>
+          <a:xfrm>
+            <a:off x="5971592" y="1792225"/>
+            <a:ext cx="4460032" cy="1477328"/>
+          </a:xfrm>
+          <a:prstGeom prst="rect">
+            <a:avLst/>
+          </a:prstGeom>
+          <a:noFill/>
+        </p:spPr>
+        <p:txBody>
+          <a:bodyPr wrap="square" rtlCol="0">
+            <a:spAutoFit/>
           </a:bodyPr>
           <a:lstStyle/>
           <a:p>
-            <a:pPr marL="0" indent="0">
-              <a:buNone/>
-            </a:pPr>
-            <a:r>
-              <a:rPr lang="en-US" sz="1400" dirty="0">
-                <a:solidFill>
-                  <a:srgbClr val="FFFFFF"/>
-                </a:solidFill>
-                <a:latin typeface="Aptos" pitchFamily="34" charset="0"/>
-                <a:ea typeface="Aptos" pitchFamily="34" charset="-122"/>
-                <a:cs typeface="Aptos" pitchFamily="34" charset="-120"/>
-              </a:rPr>
-              <a:t>• Calibrate predicted IoU.
-• Improve point selection.
-• Investigate empty-mask failures.
-• Try multi-point prompting and boundary refinement.</a:t>
-            </a:r>
-            <a:endParaRPr lang="en-US" sz="1400" dirty="0"/>
-          </a:p>
-        </p:txBody>
-      </p:sp>
-      <p:sp>
-        <p:nvSpPr>
-          <p:cNvPr id="11" name="Text 9"/>
-          <p:cNvSpPr/>
-          <p:nvPr/>
-        </p:nvSpPr>
-        <p:spPr>
-          <a:xfrm>
-            <a:off x="685800" y="6190488"/>
-            <a:ext cx="6400800" cy="228600"/>
-          </a:xfrm>
-          <a:prstGeom prst="rect">
-            <a:avLst/>
-          </a:prstGeom>
-          <a:noFill/>
-          <a:ln/>
-        </p:spPr>
-        <p:txBody>
-          <a:bodyPr wrap="square" lIns="0" tIns="0" rIns="0" bIns="0" rtlCol="0" anchor="ctr"/>
-          <a:lstStyle/>
-          <a:p>
-            <a:pPr marL="0" indent="0">
-              <a:buNone/>
-            </a:pPr>
-            <a:r>
-              <a:rPr lang="en-US" sz="1000" dirty="0">
-                <a:solidFill>
-                  <a:srgbClr val="C9DCE8"/>
-                </a:solidFill>
-              </a:rPr>
-              <a:t>Gundeep Singh • Aditya Bakhale • Raghavendra Prasad Shetti</a:t>
-            </a:r>
-            <a:endParaRPr lang="en-US" sz="1000" dirty="0"/>
-          </a:p>
-        </p:txBody>
-      </p:sp>
-      <p:sp>
-        <p:nvSpPr>
-          <p:cNvPr id="12" name="Text 10"/>
-          <p:cNvSpPr/>
-          <p:nvPr/>
-        </p:nvSpPr>
-        <p:spPr>
-          <a:xfrm>
-            <a:off x="411480" y="6510528"/>
-            <a:ext cx="4572000" cy="146304"/>
-          </a:xfrm>
-          <a:prstGeom prst="rect">
-            <a:avLst/>
-          </a:prstGeom>
-          <a:noFill/>
-          <a:ln/>
-        </p:spPr>
-        <p:txBody>
-          <a:bodyPr wrap="square" lIns="0" tIns="0" rIns="0" bIns="0" rtlCol="0" anchor="ctr"/>
-          <a:lstStyle/>
-          <a:p>
-            <a:pPr marL="0" indent="0">
-              <a:buNone/>
-            </a:pPr>
-            <a:endParaRPr lang="en-US" sz="700" dirty="0"/>
+            <a:r>
+              <a:rPr lang="en-GB" b="1" dirty="0">
+                <a:solidFill>
+                  <a:schemeClr val="bg1"/>
+                </a:solidFill>
+              </a:rPr>
+              <a:t>Fine-tuning + better boundary accuracy</a:t>
+            </a:r>
+          </a:p>
+          <a:p>
+            <a:r>
+              <a:rPr lang="en-GB" b="1" dirty="0">
+                <a:solidFill>
+                  <a:schemeClr val="bg1"/>
+                </a:solidFill>
+              </a:rPr>
+              <a:t>Better prompt selection + multi-click correction</a:t>
+            </a:r>
+          </a:p>
+          <a:p>
+            <a:r>
+              <a:rPr lang="en-GB" b="1" dirty="0">
+                <a:solidFill>
+                  <a:schemeClr val="bg1"/>
+                </a:solidFill>
+              </a:rPr>
+              <a:t>Confidence calibration + testing on more datasets</a:t>
+            </a:r>
+            <a:endParaRPr lang="en-IN" b="1" dirty="0">
+              <a:solidFill>
+                <a:schemeClr val="bg1"/>
+              </a:solidFill>
+            </a:endParaRPr>
           </a:p>
         </p:txBody>
       </p:sp>
@@ -3408,7 +4612,7 @@
                 <a:ea typeface="Aptos Display" pitchFamily="34" charset="-122"/>
                 <a:cs typeface="Aptos Display" pitchFamily="34" charset="-120"/>
               </a:rPr>
-              <a:t>Why we chose this project</a:t>
+              <a:t>What is this project about:</a:t>
             </a:r>
             <a:endParaRPr lang="en-US" sz="2700" dirty="0"/>
           </a:p>
@@ -3456,15 +4660,12 @@
         </p:spPr>
         <p:txBody>
           <a:bodyPr wrap="square" lIns="635" tIns="635" rIns="635" bIns="635" rtlCol="0" anchor="ctr">
-            <a:normAutofit fontScale="92500" lnSpcReduction="20000"/>
+            <a:normAutofit fontScale="62500" lnSpcReduction="20000"/>
           </a:bodyPr>
           <a:lstStyle/>
           <a:p>
-            <a:pPr marL="0" indent="0">
-              <a:buNone/>
-            </a:pPr>
-            <a:r>
-              <a:rPr lang="en-US" sz="2000" b="1" dirty="0">
+            <a:r>
+              <a:rPr lang="en-GB" sz="2000" b="1" dirty="0">
                 <a:solidFill>
                   <a:srgbClr val="142033"/>
                 </a:solidFill>
@@ -3472,7 +4673,30 @@
                 <a:ea typeface="Aptos" pitchFamily="34" charset="-122"/>
                 <a:cs typeface="Aptos" pitchFamily="34" charset="-120"/>
               </a:rPr>
-              <a:t>We did not want a project that only prints accuracy. We chose STT-B because it lets us test the full practical question: can a modern segmentation model work from one click, respond quickly, and still be reliable?</a:t>
+              <a:t>We built an external evaluation and reliability framework around a recent pretrained segmentation model. </a:t>
+            </a:r>
+          </a:p>
+          <a:p>
+            <a:endParaRPr lang="en-GB" sz="2000" b="1" dirty="0">
+              <a:solidFill>
+                <a:srgbClr val="142033"/>
+              </a:solidFill>
+              <a:latin typeface="Aptos" pitchFamily="34" charset="0"/>
+              <a:ea typeface="Aptos" pitchFamily="34" charset="-122"/>
+              <a:cs typeface="Aptos" pitchFamily="34" charset="-120"/>
+            </a:endParaRPr>
+          </a:p>
+          <a:p>
+            <a:r>
+              <a:rPr lang="en-GB" sz="2000" b="1" dirty="0">
+                <a:solidFill>
+                  <a:srgbClr val="142033"/>
+                </a:solidFill>
+                <a:latin typeface="Aptos" pitchFamily="34" charset="0"/>
+                <a:ea typeface="Aptos" pitchFamily="34" charset="-122"/>
+                <a:cs typeface="Aptos" pitchFamily="34" charset="-120"/>
+              </a:rPr>
+              <a:t>We reproduced STT-B, adapted it to an external dataset, evaluated its quality and efficiency, stress-tested its prompt and image robustness, compared it with SAM under a controlled protocol, investigated whether its confidence predicts failures, and extended its masks into geometric object measurements.</a:t>
             </a:r>
             <a:endParaRPr lang="en-US" sz="2000" dirty="0"/>
           </a:p>
@@ -4799,6 +6023,650 @@
 
 <file path=ppt/slides/slide4.xml><?xml version="1.0" encoding="utf-8"?>
 <p:sld xmlns:a="http://schemas.openxmlformats.org/drawingml/2006/main" xmlns:r="http://schemas.openxmlformats.org/officeDocument/2006/relationships" xmlns:p="http://schemas.openxmlformats.org/presentationml/2006/main">
+  <p:cSld>
+    <p:bg>
+      <p:bgPr>
+        <a:solidFill>
+          <a:srgbClr val="FFFFFF"/>
+        </a:solidFill>
+        <a:effectLst/>
+      </p:bgPr>
+    </p:bg>
+    <p:spTree>
+      <p:nvGrpSpPr>
+        <p:cNvPr id="1" name="">
+          <a:extLst>
+            <a:ext uri="{FF2B5EF4-FFF2-40B4-BE49-F238E27FC236}">
+              <a16:creationId xmlns:a16="http://schemas.microsoft.com/office/drawing/2014/main" id="{A8B042C5-D6A3-D572-F69B-3AFDD9C3C8C2}"/>
+            </a:ext>
+          </a:extLst>
+        </p:cNvPr>
+        <p:cNvGrpSpPr/>
+        <p:nvPr/>
+      </p:nvGrpSpPr>
+      <p:grpSpPr>
+        <a:xfrm>
+          <a:off x="0" y="0"/>
+          <a:ext cx="0" cy="0"/>
+          <a:chOff x="0" y="0"/>
+          <a:chExt cx="0" cy="0"/>
+        </a:xfrm>
+      </p:grpSpPr>
+      <p:sp>
+        <p:nvSpPr>
+          <p:cNvPr id="2" name="Shape 0">
+            <a:extLst>
+              <a:ext uri="{FF2B5EF4-FFF2-40B4-BE49-F238E27FC236}">
+                <a16:creationId xmlns:a16="http://schemas.microsoft.com/office/drawing/2014/main" id="{81A27B1D-4741-3694-8C17-C841816145C5}"/>
+              </a:ext>
+            </a:extLst>
+          </p:cNvPr>
+          <p:cNvSpPr/>
+          <p:nvPr/>
+        </p:nvSpPr>
+        <p:spPr>
+          <a:xfrm>
+            <a:off x="0" y="0"/>
+            <a:ext cx="12191695" cy="128016"/>
+          </a:xfrm>
+          <a:prstGeom prst="rect">
+            <a:avLst/>
+          </a:prstGeom>
+          <a:solidFill>
+            <a:srgbClr val="2D6F91"/>
+          </a:solidFill>
+          <a:ln w="12700">
+            <a:solidFill>
+              <a:srgbClr val="2D6F91">
+                <a:alpha val="0"/>
+              </a:srgbClr>
+            </a:solidFill>
+            <a:prstDash val="solid"/>
+          </a:ln>
+        </p:spPr>
+      </p:sp>
+      <p:sp>
+        <p:nvSpPr>
+          <p:cNvPr id="3" name="Text 1">
+            <a:extLst>
+              <a:ext uri="{FF2B5EF4-FFF2-40B4-BE49-F238E27FC236}">
+                <a16:creationId xmlns:a16="http://schemas.microsoft.com/office/drawing/2014/main" id="{3DB75675-F077-8885-4140-0DEDF9AB2D9A}"/>
+              </a:ext>
+            </a:extLst>
+          </p:cNvPr>
+          <p:cNvSpPr/>
+          <p:nvPr/>
+        </p:nvSpPr>
+        <p:spPr>
+          <a:xfrm>
+            <a:off x="502920" y="329184"/>
+            <a:ext cx="5303520" cy="201168"/>
+          </a:xfrm>
+          <a:prstGeom prst="rect">
+            <a:avLst/>
+          </a:prstGeom>
+          <a:noFill/>
+          <a:ln/>
+        </p:spPr>
+        <p:txBody>
+          <a:bodyPr wrap="square" lIns="0" tIns="0" rIns="0" bIns="0" rtlCol="0" anchor="ctr"/>
+          <a:lstStyle/>
+          <a:p>
+            <a:pPr marL="0" indent="0">
+              <a:buNone/>
+            </a:pPr>
+            <a:r>
+              <a:rPr lang="en-US" sz="800" b="1" dirty="0">
+                <a:solidFill>
+                  <a:srgbClr val="2D6F91"/>
+                </a:solidFill>
+                <a:latin typeface="Aptos" pitchFamily="34" charset="0"/>
+                <a:ea typeface="Aptos" pitchFamily="34" charset="-122"/>
+                <a:cs typeface="Aptos" pitchFamily="34" charset="-120"/>
+              </a:rPr>
+              <a:t>03 • REPRODUCTION TARGET</a:t>
+            </a:r>
+            <a:endParaRPr lang="en-US" sz="800" dirty="0"/>
+          </a:p>
+        </p:txBody>
+      </p:sp>
+      <p:sp>
+        <p:nvSpPr>
+          <p:cNvPr id="4" name="Text 2">
+            <a:extLst>
+              <a:ext uri="{FF2B5EF4-FFF2-40B4-BE49-F238E27FC236}">
+                <a16:creationId xmlns:a16="http://schemas.microsoft.com/office/drawing/2014/main" id="{29188F33-8880-27D5-ED32-62C152E91BF2}"/>
+              </a:ext>
+            </a:extLst>
+          </p:cNvPr>
+          <p:cNvSpPr/>
+          <p:nvPr/>
+        </p:nvSpPr>
+        <p:spPr>
+          <a:xfrm>
+            <a:off x="502920" y="658368"/>
+            <a:ext cx="7772400" cy="502920"/>
+          </a:xfrm>
+          <a:prstGeom prst="rect">
+            <a:avLst/>
+          </a:prstGeom>
+          <a:noFill/>
+          <a:ln/>
+        </p:spPr>
+        <p:txBody>
+          <a:bodyPr wrap="square" lIns="0" tIns="0" rIns="0" bIns="0" rtlCol="0" anchor="ctr"/>
+          <a:lstStyle/>
+          <a:p>
+            <a:pPr marL="0" indent="0">
+              <a:buNone/>
+            </a:pPr>
+            <a:r>
+              <a:rPr lang="en-US" sz="2700" dirty="0"/>
+              <a:t>Project architecture</a:t>
+            </a:r>
+          </a:p>
+        </p:txBody>
+      </p:sp>
+      <p:sp>
+        <p:nvSpPr>
+          <p:cNvPr id="5" name="Shape 3">
+            <a:extLst>
+              <a:ext uri="{FF2B5EF4-FFF2-40B4-BE49-F238E27FC236}">
+                <a16:creationId xmlns:a16="http://schemas.microsoft.com/office/drawing/2014/main" id="{2EAAA02F-097A-8B7E-F2B0-2F2C82913ABD}"/>
+              </a:ext>
+            </a:extLst>
+          </p:cNvPr>
+          <p:cNvSpPr/>
+          <p:nvPr/>
+        </p:nvSpPr>
+        <p:spPr>
+          <a:xfrm>
+            <a:off x="502920" y="1261872"/>
+            <a:ext cx="960120" cy="0"/>
+          </a:xfrm>
+          <a:prstGeom prst="line">
+            <a:avLst/>
+          </a:prstGeom>
+          <a:noFill/>
+          <a:ln w="50800">
+            <a:solidFill>
+              <a:srgbClr val="64A6BD"/>
+            </a:solidFill>
+            <a:prstDash val="solid"/>
+          </a:ln>
+        </p:spPr>
+      </p:sp>
+      <p:sp>
+        <p:nvSpPr>
+          <p:cNvPr id="6" name="Text 4">
+            <a:extLst>
+              <a:ext uri="{FF2B5EF4-FFF2-40B4-BE49-F238E27FC236}">
+                <a16:creationId xmlns:a16="http://schemas.microsoft.com/office/drawing/2014/main" id="{AFBAD141-A327-B864-C557-41E40FE10548}"/>
+              </a:ext>
+            </a:extLst>
+          </p:cNvPr>
+          <p:cNvSpPr/>
+          <p:nvPr/>
+        </p:nvSpPr>
+        <p:spPr>
+          <a:xfrm>
+            <a:off x="594360" y="1481328"/>
+            <a:ext cx="5943600" cy="1234440"/>
+          </a:xfrm>
+          <a:prstGeom prst="rect">
+            <a:avLst/>
+          </a:prstGeom>
+          <a:noFill/>
+          <a:ln/>
+        </p:spPr>
+        <p:txBody>
+          <a:bodyPr wrap="square" lIns="635" tIns="635" rIns="635" bIns="635" rtlCol="0" anchor="ctr">
+            <a:normAutofit/>
+          </a:bodyPr>
+          <a:lstStyle/>
+          <a:p>
+            <a:pPr marL="0" indent="0">
+              <a:buNone/>
+            </a:pPr>
+            <a:endParaRPr lang="en-US" sz="1900" dirty="0"/>
+          </a:p>
+        </p:txBody>
+      </p:sp>
+      <p:sp>
+        <p:nvSpPr>
+          <p:cNvPr id="11" name="Text 9">
+            <a:extLst>
+              <a:ext uri="{FF2B5EF4-FFF2-40B4-BE49-F238E27FC236}">
+                <a16:creationId xmlns:a16="http://schemas.microsoft.com/office/drawing/2014/main" id="{68F0D718-0C28-B5EB-52BD-E06172F8826C}"/>
+              </a:ext>
+            </a:extLst>
+          </p:cNvPr>
+          <p:cNvSpPr/>
+          <p:nvPr/>
+        </p:nvSpPr>
+        <p:spPr>
+          <a:xfrm>
+            <a:off x="7360920" y="1865376"/>
+            <a:ext cx="182880" cy="164592"/>
+          </a:xfrm>
+          <a:prstGeom prst="rect">
+            <a:avLst/>
+          </a:prstGeom>
+          <a:noFill/>
+          <a:ln/>
+        </p:spPr>
+        <p:txBody>
+          <a:bodyPr wrap="square" lIns="0" tIns="0" rIns="0" bIns="0" rtlCol="0" anchor="ctr"/>
+          <a:lstStyle/>
+          <a:p>
+            <a:pPr marL="0" indent="0">
+              <a:buNone/>
+            </a:pPr>
+            <a:endParaRPr lang="en-US" sz="1300" dirty="0"/>
+          </a:p>
+        </p:txBody>
+      </p:sp>
+      <p:sp>
+        <p:nvSpPr>
+          <p:cNvPr id="14" name="Text 12">
+            <a:extLst>
+              <a:ext uri="{FF2B5EF4-FFF2-40B4-BE49-F238E27FC236}">
+                <a16:creationId xmlns:a16="http://schemas.microsoft.com/office/drawing/2014/main" id="{A8EA2CF6-BD6A-BA2A-9E2B-DDFD8E68889D}"/>
+              </a:ext>
+            </a:extLst>
+          </p:cNvPr>
+          <p:cNvSpPr/>
+          <p:nvPr/>
+        </p:nvSpPr>
+        <p:spPr>
+          <a:xfrm>
+            <a:off x="7360920" y="2615184"/>
+            <a:ext cx="182880" cy="164592"/>
+          </a:xfrm>
+          <a:prstGeom prst="rect">
+            <a:avLst/>
+          </a:prstGeom>
+          <a:noFill/>
+          <a:ln/>
+        </p:spPr>
+        <p:txBody>
+          <a:bodyPr wrap="square" lIns="0" tIns="0" rIns="0" bIns="0" rtlCol="0" anchor="ctr"/>
+          <a:lstStyle/>
+          <a:p>
+            <a:pPr marL="0" indent="0">
+              <a:buNone/>
+            </a:pPr>
+            <a:endParaRPr lang="en-US" sz="1300" dirty="0"/>
+          </a:p>
+        </p:txBody>
+      </p:sp>
+      <p:pic>
+        <p:nvPicPr>
+          <p:cNvPr id="27" name="Picture 26">
+            <a:extLst>
+              <a:ext uri="{FF2B5EF4-FFF2-40B4-BE49-F238E27FC236}">
+                <a16:creationId xmlns:a16="http://schemas.microsoft.com/office/drawing/2014/main" id="{4DCD6304-186E-3BF5-CFC6-FB8B5CFDF9AD}"/>
+              </a:ext>
+            </a:extLst>
+          </p:cNvPr>
+          <p:cNvPicPr>
+            <a:picLocks noChangeAspect="1"/>
+          </p:cNvPicPr>
+          <p:nvPr/>
+        </p:nvPicPr>
+        <p:blipFill>
+          <a:blip r:embed="rId3"/>
+          <a:stretch>
+            <a:fillRect/>
+          </a:stretch>
+        </p:blipFill>
+        <p:spPr>
+          <a:xfrm>
+            <a:off x="867748" y="1513059"/>
+            <a:ext cx="9479902" cy="5145394"/>
+          </a:xfrm>
+          <a:prstGeom prst="rect">
+            <a:avLst/>
+          </a:prstGeom>
+        </p:spPr>
+      </p:pic>
+    </p:spTree>
+    <p:extLst>
+      <p:ext uri="{BB962C8B-B14F-4D97-AF65-F5344CB8AC3E}">
+        <p14:creationId xmlns:p14="http://schemas.microsoft.com/office/powerpoint/2010/main" val="687139053"/>
+      </p:ext>
+    </p:extLst>
+  </p:cSld>
+  <p:clrMapOvr>
+    <a:masterClrMapping/>
+  </p:clrMapOvr>
+</p:sld>
+</file>
+
+<file path=ppt/slides/slide5.xml><?xml version="1.0" encoding="utf-8"?>
+<p:sld xmlns:a="http://schemas.openxmlformats.org/drawingml/2006/main" xmlns:r="http://schemas.openxmlformats.org/officeDocument/2006/relationships" xmlns:p="http://schemas.openxmlformats.org/presentationml/2006/main">
+  <p:cSld>
+    <p:bg>
+      <p:bgPr>
+        <a:solidFill>
+          <a:srgbClr val="FFFFFF"/>
+        </a:solidFill>
+        <a:effectLst/>
+      </p:bgPr>
+    </p:bg>
+    <p:spTree>
+      <p:nvGrpSpPr>
+        <p:cNvPr id="1" name="">
+          <a:extLst>
+            <a:ext uri="{FF2B5EF4-FFF2-40B4-BE49-F238E27FC236}">
+              <a16:creationId xmlns:a16="http://schemas.microsoft.com/office/drawing/2014/main" id="{CA62C080-B062-9F82-7834-92B665A1B12E}"/>
+            </a:ext>
+          </a:extLst>
+        </p:cNvPr>
+        <p:cNvGrpSpPr/>
+        <p:nvPr/>
+      </p:nvGrpSpPr>
+      <p:grpSpPr>
+        <a:xfrm>
+          <a:off x="0" y="0"/>
+          <a:ext cx="0" cy="0"/>
+          <a:chOff x="0" y="0"/>
+          <a:chExt cx="0" cy="0"/>
+        </a:xfrm>
+      </p:grpSpPr>
+      <p:sp>
+        <p:nvSpPr>
+          <p:cNvPr id="2" name="Shape 0">
+            <a:extLst>
+              <a:ext uri="{FF2B5EF4-FFF2-40B4-BE49-F238E27FC236}">
+                <a16:creationId xmlns:a16="http://schemas.microsoft.com/office/drawing/2014/main" id="{13D7E530-B140-3186-5222-16A455E4D38A}"/>
+              </a:ext>
+            </a:extLst>
+          </p:cNvPr>
+          <p:cNvSpPr/>
+          <p:nvPr/>
+        </p:nvSpPr>
+        <p:spPr>
+          <a:xfrm>
+            <a:off x="0" y="0"/>
+            <a:ext cx="12191695" cy="128016"/>
+          </a:xfrm>
+          <a:prstGeom prst="rect">
+            <a:avLst/>
+          </a:prstGeom>
+          <a:solidFill>
+            <a:srgbClr val="2D6F91"/>
+          </a:solidFill>
+          <a:ln w="12700">
+            <a:solidFill>
+              <a:srgbClr val="2D6F91">
+                <a:alpha val="0"/>
+              </a:srgbClr>
+            </a:solidFill>
+            <a:prstDash val="solid"/>
+          </a:ln>
+        </p:spPr>
+      </p:sp>
+      <p:sp>
+        <p:nvSpPr>
+          <p:cNvPr id="3" name="Text 1">
+            <a:extLst>
+              <a:ext uri="{FF2B5EF4-FFF2-40B4-BE49-F238E27FC236}">
+                <a16:creationId xmlns:a16="http://schemas.microsoft.com/office/drawing/2014/main" id="{73389A74-D846-678E-5E9F-2F19575058AB}"/>
+              </a:ext>
+            </a:extLst>
+          </p:cNvPr>
+          <p:cNvSpPr/>
+          <p:nvPr/>
+        </p:nvSpPr>
+        <p:spPr>
+          <a:xfrm>
+            <a:off x="502920" y="329184"/>
+            <a:ext cx="5303520" cy="201168"/>
+          </a:xfrm>
+          <a:prstGeom prst="rect">
+            <a:avLst/>
+          </a:prstGeom>
+          <a:noFill/>
+          <a:ln/>
+        </p:spPr>
+        <p:txBody>
+          <a:bodyPr wrap="square" lIns="0" tIns="0" rIns="0" bIns="0" rtlCol="0" anchor="ctr"/>
+          <a:lstStyle/>
+          <a:p>
+            <a:pPr marL="0" indent="0">
+              <a:buNone/>
+            </a:pPr>
+            <a:r>
+              <a:rPr lang="en-US" sz="800" b="1" dirty="0">
+                <a:solidFill>
+                  <a:srgbClr val="2D6F91"/>
+                </a:solidFill>
+                <a:latin typeface="Aptos" pitchFamily="34" charset="0"/>
+                <a:ea typeface="Aptos" pitchFamily="34" charset="-122"/>
+                <a:cs typeface="Aptos" pitchFamily="34" charset="-120"/>
+              </a:rPr>
+              <a:t>04 • REPRODUCTION TARGET</a:t>
+            </a:r>
+            <a:endParaRPr lang="en-US" sz="800" dirty="0"/>
+          </a:p>
+        </p:txBody>
+      </p:sp>
+      <p:sp>
+        <p:nvSpPr>
+          <p:cNvPr id="4" name="Text 2">
+            <a:extLst>
+              <a:ext uri="{FF2B5EF4-FFF2-40B4-BE49-F238E27FC236}">
+                <a16:creationId xmlns:a16="http://schemas.microsoft.com/office/drawing/2014/main" id="{008DE800-83B6-873D-EA16-F5772A94443B}"/>
+              </a:ext>
+            </a:extLst>
+          </p:cNvPr>
+          <p:cNvSpPr/>
+          <p:nvPr/>
+        </p:nvSpPr>
+        <p:spPr>
+          <a:xfrm>
+            <a:off x="502920" y="658368"/>
+            <a:ext cx="7772400" cy="502920"/>
+          </a:xfrm>
+          <a:prstGeom prst="rect">
+            <a:avLst/>
+          </a:prstGeom>
+          <a:noFill/>
+          <a:ln/>
+        </p:spPr>
+        <p:txBody>
+          <a:bodyPr wrap="square" lIns="0" tIns="0" rIns="0" bIns="0" rtlCol="0" anchor="ctr"/>
+          <a:lstStyle/>
+          <a:p>
+            <a:pPr marL="0" indent="0">
+              <a:buNone/>
+            </a:pPr>
+            <a:r>
+              <a:rPr lang="en-US" sz="2700" dirty="0"/>
+              <a:t>What our project architecture:</a:t>
+            </a:r>
+          </a:p>
+        </p:txBody>
+      </p:sp>
+      <p:sp>
+        <p:nvSpPr>
+          <p:cNvPr id="5" name="Shape 3">
+            <a:extLst>
+              <a:ext uri="{FF2B5EF4-FFF2-40B4-BE49-F238E27FC236}">
+                <a16:creationId xmlns:a16="http://schemas.microsoft.com/office/drawing/2014/main" id="{D90F39FC-625B-E20F-D551-DAD9910165E7}"/>
+              </a:ext>
+            </a:extLst>
+          </p:cNvPr>
+          <p:cNvSpPr/>
+          <p:nvPr/>
+        </p:nvSpPr>
+        <p:spPr>
+          <a:xfrm>
+            <a:off x="502920" y="1261872"/>
+            <a:ext cx="960120" cy="0"/>
+          </a:xfrm>
+          <a:prstGeom prst="line">
+            <a:avLst/>
+          </a:prstGeom>
+          <a:noFill/>
+          <a:ln w="50800">
+            <a:solidFill>
+              <a:srgbClr val="64A6BD"/>
+            </a:solidFill>
+            <a:prstDash val="solid"/>
+          </a:ln>
+        </p:spPr>
+      </p:sp>
+      <p:sp>
+        <p:nvSpPr>
+          <p:cNvPr id="6" name="Text 4">
+            <a:extLst>
+              <a:ext uri="{FF2B5EF4-FFF2-40B4-BE49-F238E27FC236}">
+                <a16:creationId xmlns:a16="http://schemas.microsoft.com/office/drawing/2014/main" id="{EA1FD9D5-1AAE-B482-0821-916922CF38DC}"/>
+              </a:ext>
+            </a:extLst>
+          </p:cNvPr>
+          <p:cNvSpPr/>
+          <p:nvPr/>
+        </p:nvSpPr>
+        <p:spPr>
+          <a:xfrm>
+            <a:off x="594360" y="1481328"/>
+            <a:ext cx="5943600" cy="1234440"/>
+          </a:xfrm>
+          <a:prstGeom prst="rect">
+            <a:avLst/>
+          </a:prstGeom>
+          <a:noFill/>
+          <a:ln/>
+        </p:spPr>
+        <p:txBody>
+          <a:bodyPr wrap="square" lIns="635" tIns="635" rIns="635" bIns="635" rtlCol="0" anchor="ctr">
+            <a:normAutofit/>
+          </a:bodyPr>
+          <a:lstStyle/>
+          <a:p>
+            <a:pPr marL="0" indent="0">
+              <a:buNone/>
+            </a:pPr>
+            <a:endParaRPr lang="en-US" sz="1900" dirty="0"/>
+          </a:p>
+        </p:txBody>
+      </p:sp>
+      <p:sp>
+        <p:nvSpPr>
+          <p:cNvPr id="11" name="Text 9">
+            <a:extLst>
+              <a:ext uri="{FF2B5EF4-FFF2-40B4-BE49-F238E27FC236}">
+                <a16:creationId xmlns:a16="http://schemas.microsoft.com/office/drawing/2014/main" id="{08960C4A-9DEE-C74D-47C4-BAA61243AF3A}"/>
+              </a:ext>
+            </a:extLst>
+          </p:cNvPr>
+          <p:cNvSpPr/>
+          <p:nvPr/>
+        </p:nvSpPr>
+        <p:spPr>
+          <a:xfrm>
+            <a:off x="7360920" y="1865376"/>
+            <a:ext cx="182880" cy="164592"/>
+          </a:xfrm>
+          <a:prstGeom prst="rect">
+            <a:avLst/>
+          </a:prstGeom>
+          <a:noFill/>
+          <a:ln/>
+        </p:spPr>
+        <p:txBody>
+          <a:bodyPr wrap="square" lIns="0" tIns="0" rIns="0" bIns="0" rtlCol="0" anchor="ctr"/>
+          <a:lstStyle/>
+          <a:p>
+            <a:pPr marL="0" indent="0">
+              <a:buNone/>
+            </a:pPr>
+            <a:endParaRPr lang="en-US" sz="1300" dirty="0"/>
+          </a:p>
+        </p:txBody>
+      </p:sp>
+      <p:sp>
+        <p:nvSpPr>
+          <p:cNvPr id="14" name="Text 12">
+            <a:extLst>
+              <a:ext uri="{FF2B5EF4-FFF2-40B4-BE49-F238E27FC236}">
+                <a16:creationId xmlns:a16="http://schemas.microsoft.com/office/drawing/2014/main" id="{B205755D-055A-1B2A-A904-A752EBBEE32B}"/>
+              </a:ext>
+            </a:extLst>
+          </p:cNvPr>
+          <p:cNvSpPr/>
+          <p:nvPr/>
+        </p:nvSpPr>
+        <p:spPr>
+          <a:xfrm>
+            <a:off x="7360920" y="2615184"/>
+            <a:ext cx="182880" cy="164592"/>
+          </a:xfrm>
+          <a:prstGeom prst="rect">
+            <a:avLst/>
+          </a:prstGeom>
+          <a:noFill/>
+          <a:ln/>
+        </p:spPr>
+        <p:txBody>
+          <a:bodyPr wrap="square" lIns="0" tIns="0" rIns="0" bIns="0" rtlCol="0" anchor="ctr"/>
+          <a:lstStyle/>
+          <a:p>
+            <a:pPr marL="0" indent="0">
+              <a:buNone/>
+            </a:pPr>
+            <a:endParaRPr lang="en-US" sz="1300" dirty="0"/>
+          </a:p>
+        </p:txBody>
+      </p:sp>
+      <p:pic>
+        <p:nvPicPr>
+          <p:cNvPr id="8" name="Picture 7">
+            <a:extLst>
+              <a:ext uri="{FF2B5EF4-FFF2-40B4-BE49-F238E27FC236}">
+                <a16:creationId xmlns:a16="http://schemas.microsoft.com/office/drawing/2014/main" id="{E6BEC302-D738-3E2E-8186-AC17D6B141E1}"/>
+              </a:ext>
+            </a:extLst>
+          </p:cNvPr>
+          <p:cNvPicPr>
+            <a:picLocks noChangeAspect="1"/>
+          </p:cNvPicPr>
+          <p:nvPr/>
+        </p:nvPicPr>
+        <p:blipFill>
+          <a:blip r:embed="rId3"/>
+          <a:stretch>
+            <a:fillRect/>
+          </a:stretch>
+        </p:blipFill>
+        <p:spPr>
+          <a:xfrm>
+            <a:off x="594360" y="1362458"/>
+            <a:ext cx="11330162" cy="5166358"/>
+          </a:xfrm>
+          <a:prstGeom prst="rect">
+            <a:avLst/>
+          </a:prstGeom>
+        </p:spPr>
+      </p:pic>
+    </p:spTree>
+    <p:extLst>
+      <p:ext uri="{BB962C8B-B14F-4D97-AF65-F5344CB8AC3E}">
+        <p14:creationId xmlns:p14="http://schemas.microsoft.com/office/powerpoint/2010/main" val="675254704"/>
+      </p:ext>
+    </p:extLst>
+  </p:cSld>
+  <p:clrMapOvr>
+    <a:masterClrMapping/>
+  </p:clrMapOvr>
+</p:sld>
+</file>
+
+<file path=ppt/slides/slide6.xml><?xml version="1.0" encoding="utf-8"?>
+<p:sld xmlns:a="http://schemas.openxmlformats.org/drawingml/2006/main" xmlns:r="http://schemas.openxmlformats.org/officeDocument/2006/relationships" xmlns:p="http://schemas.openxmlformats.org/presentationml/2006/main">
   <p:cSld name="Slide 4">
     <p:bg>
       <p:bgPr>
@@ -4882,7 +6750,7 @@
                 <a:ea typeface="Aptos" pitchFamily="34" charset="-122"/>
                 <a:cs typeface="Aptos" pitchFamily="34" charset="-120"/>
               </a:rPr>
-              <a:t>03 • METHOD</a:t>
+              <a:t>05 • METHOD</a:t>
             </a:r>
             <a:endParaRPr lang="en-US" sz="800" dirty="0"/>
           </a:p>
@@ -5867,7 +7735,7 @@
 </p:sld>
 </file>
 
-<file path=ppt/slides/slide5.xml><?xml version="1.0" encoding="utf-8"?>
+<file path=ppt/slides/slide7.xml><?xml version="1.0" encoding="utf-8"?>
 <p:sld xmlns:a="http://schemas.openxmlformats.org/drawingml/2006/main" xmlns:r="http://schemas.openxmlformats.org/officeDocument/2006/relationships" xmlns:p="http://schemas.openxmlformats.org/presentationml/2006/main">
   <p:cSld name="Slide 5">
     <p:bg>
@@ -5952,7 +7820,7 @@
                 <a:ea typeface="Aptos" pitchFamily="34" charset="-122"/>
                 <a:cs typeface="Aptos" pitchFamily="34" charset="-120"/>
               </a:rPr>
-              <a:t>04 • EXPERIMENTAL SETUP</a:t>
+              <a:t>06 • EXPERIMENTAL SETUP</a:t>
             </a:r>
             <a:endParaRPr lang="en-US" sz="800" dirty="0"/>
           </a:p>
@@ -6608,7 +8476,7 @@
 </p:sld>
 </file>
 
-<file path=ppt/slides/slide6.xml><?xml version="1.0" encoding="utf-8"?>
+<file path=ppt/slides/slide8.xml><?xml version="1.0" encoding="utf-8"?>
 <p:sld xmlns:a="http://schemas.openxmlformats.org/drawingml/2006/main" xmlns:r="http://schemas.openxmlformats.org/officeDocument/2006/relationships" xmlns:p="http://schemas.openxmlformats.org/presentationml/2006/main">
   <p:cSld name="Slide 6">
     <p:bg>
@@ -6693,7 +8561,7 @@
                 <a:ea typeface="Aptos" pitchFamily="34" charset="-122"/>
                 <a:cs typeface="Aptos" pitchFamily="34" charset="-120"/>
               </a:rPr>
-              <a:t>05 • MAIN RESULT</a:t>
+              <a:t>07 • MAIN RESULT</a:t>
             </a:r>
             <a:endParaRPr lang="en-US" sz="800" dirty="0"/>
           </a:p>
@@ -7666,7 +9534,7 @@
 </p:sld>
 </file>
 
-<file path=ppt/slides/slide7.xml><?xml version="1.0" encoding="utf-8"?>
+<file path=ppt/slides/slide9.xml><?xml version="1.0" encoding="utf-8"?>
 <p:sld xmlns:a="http://schemas.openxmlformats.org/drawingml/2006/main" xmlns:r="http://schemas.openxmlformats.org/officeDocument/2006/relationships" xmlns:p="http://schemas.openxmlformats.org/presentationml/2006/main">
   <p:cSld name="Slide 7">
     <p:bg>
@@ -7751,7 +9619,7 @@
                 <a:ea typeface="Aptos" pitchFamily="34" charset="-122"/>
                 <a:cs typeface="Aptos" pitchFamily="34" charset="-120"/>
               </a:rPr>
-              <a:t>06 • VISUAL EVIDENCE</a:t>
+              <a:t>08• VISUAL EVIDENCE</a:t>
             </a:r>
             <a:endParaRPr lang="en-US" sz="800" dirty="0"/>
           </a:p>
@@ -7964,917 +9832,6 @@
               <a:t>Takeaway: STT-B can be very useful when it works, but the failures are important enough to analyze.</a:t>
             </a:r>
             <a:endParaRPr lang="en-US" sz="1700" dirty="0"/>
-          </a:p>
-        </p:txBody>
-      </p:sp>
-    </p:spTree>
-  </p:cSld>
-  <p:clrMapOvr>
-    <a:masterClrMapping/>
-  </p:clrMapOvr>
-</p:sld>
-</file>
-
-<file path=ppt/slides/slide8.xml><?xml version="1.0" encoding="utf-8"?>
-<p:sld xmlns:a="http://schemas.openxmlformats.org/drawingml/2006/main" xmlns:r="http://schemas.openxmlformats.org/officeDocument/2006/relationships" xmlns:p="http://schemas.openxmlformats.org/presentationml/2006/main">
-  <p:cSld name="Slide 8">
-    <p:bg>
-      <p:bgPr>
-        <a:solidFill>
-          <a:srgbClr val="FFFFFF"/>
-        </a:solidFill>
-        <a:effectLst/>
-      </p:bgPr>
-    </p:bg>
-    <p:spTree>
-      <p:nvGrpSpPr>
-        <p:cNvPr id="1" name=""/>
-        <p:cNvGrpSpPr/>
-        <p:nvPr/>
-      </p:nvGrpSpPr>
-      <p:grpSpPr>
-        <a:xfrm>
-          <a:off x="0" y="0"/>
-          <a:ext cx="0" cy="0"/>
-          <a:chOff x="0" y="0"/>
-          <a:chExt cx="0" cy="0"/>
-        </a:xfrm>
-      </p:grpSpPr>
-      <p:sp>
-        <p:nvSpPr>
-          <p:cNvPr id="2" name="Shape 0"/>
-          <p:cNvSpPr/>
-          <p:nvPr/>
-        </p:nvSpPr>
-        <p:spPr>
-          <a:xfrm>
-            <a:off x="0" y="0"/>
-            <a:ext cx="12191695" cy="128016"/>
-          </a:xfrm>
-          <a:prstGeom prst="rect">
-            <a:avLst/>
-          </a:prstGeom>
-          <a:solidFill>
-            <a:srgbClr val="2D6F91"/>
-          </a:solidFill>
-          <a:ln w="12700">
-            <a:solidFill>
-              <a:srgbClr val="2D6F91">
-                <a:alpha val="0"/>
-              </a:srgbClr>
-            </a:solidFill>
-            <a:prstDash val="solid"/>
-          </a:ln>
-        </p:spPr>
-      </p:sp>
-      <p:sp>
-        <p:nvSpPr>
-          <p:cNvPr id="3" name="Text 1"/>
-          <p:cNvSpPr/>
-          <p:nvPr/>
-        </p:nvSpPr>
-        <p:spPr>
-          <a:xfrm>
-            <a:off x="502920" y="329184"/>
-            <a:ext cx="5303520" cy="201168"/>
-          </a:xfrm>
-          <a:prstGeom prst="rect">
-            <a:avLst/>
-          </a:prstGeom>
-          <a:noFill/>
-          <a:ln/>
-        </p:spPr>
-        <p:txBody>
-          <a:bodyPr wrap="square" lIns="0" tIns="0" rIns="0" bIns="0" rtlCol="0" anchor="ctr"/>
-          <a:lstStyle/>
-          <a:p>
-            <a:pPr marL="0" indent="0">
-              <a:buNone/>
-            </a:pPr>
-            <a:r>
-              <a:rPr lang="en-US" sz="800" b="1" dirty="0">
-                <a:solidFill>
-                  <a:srgbClr val="2D6F91"/>
-                </a:solidFill>
-                <a:latin typeface="Aptos" pitchFamily="34" charset="0"/>
-                <a:ea typeface="Aptos" pitchFamily="34" charset="-122"/>
-                <a:cs typeface="Aptos" pitchFamily="34" charset="-120"/>
-              </a:rPr>
-              <a:t>07 • ACCURACY–EFFICIENCY TRADE-OFF</a:t>
-            </a:r>
-            <a:endParaRPr lang="en-US" sz="800" dirty="0"/>
-          </a:p>
-        </p:txBody>
-      </p:sp>
-      <p:sp>
-        <p:nvSpPr>
-          <p:cNvPr id="4" name="Text 2"/>
-          <p:cNvSpPr/>
-          <p:nvPr/>
-        </p:nvSpPr>
-        <p:spPr>
-          <a:xfrm>
-            <a:off x="502920" y="658368"/>
-            <a:ext cx="7772400" cy="502920"/>
-          </a:xfrm>
-          <a:prstGeom prst="rect">
-            <a:avLst/>
-          </a:prstGeom>
-          <a:noFill/>
-          <a:ln/>
-        </p:spPr>
-        <p:txBody>
-          <a:bodyPr wrap="square" lIns="0" tIns="0" rIns="0" bIns="0" rtlCol="0" anchor="ctr"/>
-          <a:lstStyle/>
-          <a:p>
-            <a:pPr marL="0" indent="0">
-              <a:buNone/>
-            </a:pPr>
-            <a:r>
-              <a:rPr lang="en-US" sz="2700" b="1" dirty="0">
-                <a:solidFill>
-                  <a:srgbClr val="142033"/>
-                </a:solidFill>
-                <a:latin typeface="Aptos Display" pitchFamily="34" charset="0"/>
-                <a:ea typeface="Aptos Display" pitchFamily="34" charset="-122"/>
-                <a:cs typeface="Aptos Display" pitchFamily="34" charset="-120"/>
-              </a:rPr>
-              <a:t>Why STT-B was worth evaluating</a:t>
-            </a:r>
-            <a:endParaRPr lang="en-US" sz="2700" dirty="0"/>
-          </a:p>
-        </p:txBody>
-      </p:sp>
-      <p:sp>
-        <p:nvSpPr>
-          <p:cNvPr id="5" name="Shape 3"/>
-          <p:cNvSpPr/>
-          <p:nvPr/>
-        </p:nvSpPr>
-        <p:spPr>
-          <a:xfrm>
-            <a:off x="502920" y="1261872"/>
-            <a:ext cx="960120" cy="0"/>
-          </a:xfrm>
-          <a:prstGeom prst="line">
-            <a:avLst/>
-          </a:prstGeom>
-          <a:noFill/>
-          <a:ln w="50800">
-            <a:solidFill>
-              <a:srgbClr val="64A6BD"/>
-            </a:solidFill>
-            <a:prstDash val="solid"/>
-          </a:ln>
-        </p:spPr>
-      </p:sp>
-      <p:pic>
-        <p:nvPicPr>
-          <p:cNvPr id="6" name="Image 0" descr="/mnt/data/cvdl_extract/cv_dl project/stt_vs_sam_iou.png"/>
-          <p:cNvPicPr>
-            <a:picLocks noChangeAspect="1"/>
-          </p:cNvPicPr>
-          <p:nvPr/>
-        </p:nvPicPr>
-        <p:blipFill>
-          <a:blip r:embed="rId3"/>
-          <a:stretch>
-            <a:fillRect/>
-          </a:stretch>
-        </p:blipFill>
-        <p:spPr>
-          <a:xfrm>
-            <a:off x="685800" y="1521823"/>
-            <a:ext cx="4754880" cy="2717074"/>
-          </a:xfrm>
-          <a:prstGeom prst="rect">
-            <a:avLst/>
-          </a:prstGeom>
-        </p:spPr>
-      </p:pic>
-      <p:pic>
-        <p:nvPicPr>
-          <p:cNvPr id="7" name="Image 1" descr="/mnt/data/cvdl_extract/cv_dl project/stt_vs_sam_runtime.png"/>
-          <p:cNvPicPr>
-            <a:picLocks noChangeAspect="1"/>
-          </p:cNvPicPr>
-          <p:nvPr/>
-        </p:nvPicPr>
-        <p:blipFill>
-          <a:blip r:embed="rId4"/>
-          <a:stretch>
-            <a:fillRect/>
-          </a:stretch>
-        </p:blipFill>
-        <p:spPr>
-          <a:xfrm>
-            <a:off x="5806440" y="1521823"/>
-            <a:ext cx="4754880" cy="2717074"/>
-          </a:xfrm>
-          <a:prstGeom prst="rect">
-            <a:avLst/>
-          </a:prstGeom>
-        </p:spPr>
-      </p:pic>
-      <p:sp>
-        <p:nvSpPr>
-          <p:cNvPr id="8" name="Text 4"/>
-          <p:cNvSpPr/>
-          <p:nvPr/>
-        </p:nvSpPr>
-        <p:spPr>
-          <a:xfrm>
-            <a:off x="868680" y="4709160"/>
-            <a:ext cx="2057400" cy="201168"/>
-          </a:xfrm>
-          <a:prstGeom prst="rect">
-            <a:avLst/>
-          </a:prstGeom>
-          <a:noFill/>
-          <a:ln/>
-        </p:spPr>
-        <p:txBody>
-          <a:bodyPr wrap="square" lIns="381" tIns="381" rIns="381" bIns="381" rtlCol="0" anchor="ctr"/>
-          <a:lstStyle/>
-          <a:p>
-            <a:pPr marL="0" indent="0">
-              <a:buNone/>
-            </a:pPr>
-            <a:r>
-              <a:rPr lang="en-US" sz="800" b="1" dirty="0">
-                <a:solidFill>
-                  <a:srgbClr val="5C6B78"/>
-                </a:solidFill>
-                <a:latin typeface="Aptos" pitchFamily="34" charset="0"/>
-                <a:ea typeface="Aptos" pitchFamily="34" charset="-122"/>
-                <a:cs typeface="Aptos" pitchFamily="34" charset="-120"/>
-              </a:rPr>
-              <a:t>STT-B IOU</a:t>
-            </a:r>
-            <a:endParaRPr lang="en-US" sz="800" dirty="0"/>
-          </a:p>
-        </p:txBody>
-      </p:sp>
-      <p:sp>
-        <p:nvSpPr>
-          <p:cNvPr id="9" name="Text 5"/>
-          <p:cNvSpPr/>
-          <p:nvPr/>
-        </p:nvSpPr>
-        <p:spPr>
-          <a:xfrm>
-            <a:off x="868680" y="4937760"/>
-            <a:ext cx="2057400" cy="502920"/>
-          </a:xfrm>
-          <a:prstGeom prst="rect">
-            <a:avLst/>
-          </a:prstGeom>
-          <a:solidFill>
-            <a:srgbClr val="EEF3F7"/>
-          </a:solidFill>
-          <a:ln>
-            <a:solidFill>
-              <a:srgbClr val="D9E2EA">
-                <a:alpha val="80000"/>
-              </a:srgbClr>
-            </a:solidFill>
-          </a:ln>
-        </p:spPr>
-        <p:txBody>
-          <a:bodyPr wrap="square" lIns="635" tIns="635" rIns="635" bIns="635" rtlCol="0" anchor="ctr">
-            <a:normAutofit/>
-          </a:bodyPr>
-          <a:lstStyle/>
-          <a:p>
-            <a:pPr marL="0" indent="0">
-              <a:buNone/>
-            </a:pPr>
-            <a:r>
-              <a:rPr lang="en-US" sz="2300" b="1" dirty="0">
-                <a:solidFill>
-                  <a:srgbClr val="2D6F91"/>
-                </a:solidFill>
-                <a:latin typeface="Aptos Display" pitchFamily="34" charset="0"/>
-                <a:ea typeface="Aptos Display" pitchFamily="34" charset="-122"/>
-                <a:cs typeface="Aptos Display" pitchFamily="34" charset="-120"/>
-              </a:rPr>
-              <a:t>0.631</a:t>
-            </a:r>
-            <a:endParaRPr lang="en-US" sz="2300" dirty="0"/>
-          </a:p>
-        </p:txBody>
-      </p:sp>
-      <p:sp>
-        <p:nvSpPr>
-          <p:cNvPr id="10" name="Text 6"/>
-          <p:cNvSpPr/>
-          <p:nvPr/>
-        </p:nvSpPr>
-        <p:spPr>
-          <a:xfrm>
-            <a:off x="3108960" y="4709160"/>
-            <a:ext cx="2057400" cy="201168"/>
-          </a:xfrm>
-          <a:prstGeom prst="rect">
-            <a:avLst/>
-          </a:prstGeom>
-          <a:noFill/>
-          <a:ln/>
-        </p:spPr>
-        <p:txBody>
-          <a:bodyPr wrap="square" lIns="381" tIns="381" rIns="381" bIns="381" rtlCol="0" anchor="ctr"/>
-          <a:lstStyle/>
-          <a:p>
-            <a:pPr marL="0" indent="0">
-              <a:buNone/>
-            </a:pPr>
-            <a:r>
-              <a:rPr lang="en-US" sz="800" b="1" dirty="0">
-                <a:solidFill>
-                  <a:srgbClr val="5C6B78"/>
-                </a:solidFill>
-                <a:latin typeface="Aptos" pitchFamily="34" charset="0"/>
-                <a:ea typeface="Aptos" pitchFamily="34" charset="-122"/>
-                <a:cs typeface="Aptos" pitchFamily="34" charset="-120"/>
-              </a:rPr>
-              <a:t>SAM IOU</a:t>
-            </a:r>
-            <a:endParaRPr lang="en-US" sz="800" dirty="0"/>
-          </a:p>
-        </p:txBody>
-      </p:sp>
-      <p:sp>
-        <p:nvSpPr>
-          <p:cNvPr id="11" name="Text 7"/>
-          <p:cNvSpPr/>
-          <p:nvPr/>
-        </p:nvSpPr>
-        <p:spPr>
-          <a:xfrm>
-            <a:off x="3108960" y="4937760"/>
-            <a:ext cx="2057400" cy="502920"/>
-          </a:xfrm>
-          <a:prstGeom prst="rect">
-            <a:avLst/>
-          </a:prstGeom>
-          <a:solidFill>
-            <a:srgbClr val="EEF3F7"/>
-          </a:solidFill>
-          <a:ln>
-            <a:solidFill>
-              <a:srgbClr val="D9E2EA">
-                <a:alpha val="80000"/>
-              </a:srgbClr>
-            </a:solidFill>
-          </a:ln>
-        </p:spPr>
-        <p:txBody>
-          <a:bodyPr wrap="square" lIns="635" tIns="635" rIns="635" bIns="635" rtlCol="0" anchor="ctr">
-            <a:normAutofit/>
-          </a:bodyPr>
-          <a:lstStyle/>
-          <a:p>
-            <a:pPr marL="0" indent="0">
-              <a:buNone/>
-            </a:pPr>
-            <a:r>
-              <a:rPr lang="en-US" sz="2300" b="1" dirty="0">
-                <a:solidFill>
-                  <a:srgbClr val="2D6F91"/>
-                </a:solidFill>
-                <a:latin typeface="Aptos Display" pitchFamily="34" charset="0"/>
-                <a:ea typeface="Aptos Display" pitchFamily="34" charset="-122"/>
-                <a:cs typeface="Aptos Display" pitchFamily="34" charset="-120"/>
-              </a:rPr>
-              <a:t>0.672</a:t>
-            </a:r>
-            <a:endParaRPr lang="en-US" sz="2300" dirty="0"/>
-          </a:p>
-        </p:txBody>
-      </p:sp>
-      <p:sp>
-        <p:nvSpPr>
-          <p:cNvPr id="12" name="Text 8"/>
-          <p:cNvSpPr/>
-          <p:nvPr/>
-        </p:nvSpPr>
-        <p:spPr>
-          <a:xfrm>
-            <a:off x="5989320" y="4709160"/>
-            <a:ext cx="2057400" cy="201168"/>
-          </a:xfrm>
-          <a:prstGeom prst="rect">
-            <a:avLst/>
-          </a:prstGeom>
-          <a:noFill/>
-          <a:ln/>
-        </p:spPr>
-        <p:txBody>
-          <a:bodyPr wrap="square" lIns="381" tIns="381" rIns="381" bIns="381" rtlCol="0" anchor="ctr"/>
-          <a:lstStyle/>
-          <a:p>
-            <a:pPr marL="0" indent="0">
-              <a:buNone/>
-            </a:pPr>
-            <a:r>
-              <a:rPr lang="en-US" sz="800" b="1" dirty="0">
-                <a:solidFill>
-                  <a:srgbClr val="5C6B78"/>
-                </a:solidFill>
-                <a:latin typeface="Aptos" pitchFamily="34" charset="0"/>
-                <a:ea typeface="Aptos" pitchFamily="34" charset="-122"/>
-                <a:cs typeface="Aptos" pitchFamily="34" charset="-120"/>
-              </a:rPr>
-              <a:t>STT-B FPS</a:t>
-            </a:r>
-            <a:endParaRPr lang="en-US" sz="800" dirty="0"/>
-          </a:p>
-        </p:txBody>
-      </p:sp>
-      <p:sp>
-        <p:nvSpPr>
-          <p:cNvPr id="13" name="Text 9"/>
-          <p:cNvSpPr/>
-          <p:nvPr/>
-        </p:nvSpPr>
-        <p:spPr>
-          <a:xfrm>
-            <a:off x="5989320" y="4937760"/>
-            <a:ext cx="2057400" cy="502920"/>
-          </a:xfrm>
-          <a:prstGeom prst="rect">
-            <a:avLst/>
-          </a:prstGeom>
-          <a:solidFill>
-            <a:srgbClr val="E7F3EF"/>
-          </a:solidFill>
-          <a:ln>
-            <a:solidFill>
-              <a:srgbClr val="D9E2EA">
-                <a:alpha val="80000"/>
-              </a:srgbClr>
-            </a:solidFill>
-          </a:ln>
-        </p:spPr>
-        <p:txBody>
-          <a:bodyPr wrap="square" lIns="635" tIns="635" rIns="635" bIns="635" rtlCol="0" anchor="ctr">
-            <a:normAutofit/>
-          </a:bodyPr>
-          <a:lstStyle/>
-          <a:p>
-            <a:pPr marL="0" indent="0">
-              <a:buNone/>
-            </a:pPr>
-            <a:r>
-              <a:rPr lang="en-US" sz="2300" b="1" dirty="0">
-                <a:solidFill>
-                  <a:srgbClr val="2D8A68"/>
-                </a:solidFill>
-                <a:latin typeface="Aptos Display" pitchFamily="34" charset="0"/>
-                <a:ea typeface="Aptos Display" pitchFamily="34" charset="-122"/>
-                <a:cs typeface="Aptos Display" pitchFamily="34" charset="-120"/>
-              </a:rPr>
-              <a:t>13.54</a:t>
-            </a:r>
-            <a:endParaRPr lang="en-US" sz="2300" dirty="0"/>
-          </a:p>
-        </p:txBody>
-      </p:sp>
-      <p:sp>
-        <p:nvSpPr>
-          <p:cNvPr id="14" name="Text 10"/>
-          <p:cNvSpPr/>
-          <p:nvPr/>
-        </p:nvSpPr>
-        <p:spPr>
-          <a:xfrm>
-            <a:off x="8229600" y="4709160"/>
-            <a:ext cx="2057400" cy="201168"/>
-          </a:xfrm>
-          <a:prstGeom prst="rect">
-            <a:avLst/>
-          </a:prstGeom>
-          <a:noFill/>
-          <a:ln/>
-        </p:spPr>
-        <p:txBody>
-          <a:bodyPr wrap="square" lIns="381" tIns="381" rIns="381" bIns="381" rtlCol="0" anchor="ctr"/>
-          <a:lstStyle/>
-          <a:p>
-            <a:pPr marL="0" indent="0">
-              <a:buNone/>
-            </a:pPr>
-            <a:r>
-              <a:rPr lang="en-US" sz="800" b="1" dirty="0">
-                <a:solidFill>
-                  <a:srgbClr val="5C6B78"/>
-                </a:solidFill>
-                <a:latin typeface="Aptos" pitchFamily="34" charset="0"/>
-                <a:ea typeface="Aptos" pitchFamily="34" charset="-122"/>
-                <a:cs typeface="Aptos" pitchFamily="34" charset="-120"/>
-              </a:rPr>
-              <a:t>SAM FPS</a:t>
-            </a:r>
-            <a:endParaRPr lang="en-US" sz="800" dirty="0"/>
-          </a:p>
-        </p:txBody>
-      </p:sp>
-      <p:sp>
-        <p:nvSpPr>
-          <p:cNvPr id="15" name="Text 11"/>
-          <p:cNvSpPr/>
-          <p:nvPr/>
-        </p:nvSpPr>
-        <p:spPr>
-          <a:xfrm>
-            <a:off x="8229600" y="4937760"/>
-            <a:ext cx="2057400" cy="502920"/>
-          </a:xfrm>
-          <a:prstGeom prst="rect">
-            <a:avLst/>
-          </a:prstGeom>
-          <a:solidFill>
-            <a:srgbClr val="FFF4E4"/>
-          </a:solidFill>
-          <a:ln>
-            <a:solidFill>
-              <a:srgbClr val="D9E2EA">
-                <a:alpha val="80000"/>
-              </a:srgbClr>
-            </a:solidFill>
-          </a:ln>
-        </p:spPr>
-        <p:txBody>
-          <a:bodyPr wrap="square" lIns="635" tIns="635" rIns="635" bIns="635" rtlCol="0" anchor="ctr">
-            <a:normAutofit/>
-          </a:bodyPr>
-          <a:lstStyle/>
-          <a:p>
-            <a:pPr marL="0" indent="0">
-              <a:buNone/>
-            </a:pPr>
-            <a:r>
-              <a:rPr lang="en-US" sz="2300" b="1" dirty="0">
-                <a:solidFill>
-                  <a:srgbClr val="D69239"/>
-                </a:solidFill>
-                <a:latin typeface="Aptos Display" pitchFamily="34" charset="0"/>
-                <a:ea typeface="Aptos Display" pitchFamily="34" charset="-122"/>
-                <a:cs typeface="Aptos Display" pitchFamily="34" charset="-120"/>
-              </a:rPr>
-              <a:t>2.28</a:t>
-            </a:r>
-            <a:endParaRPr lang="en-US" sz="2300" dirty="0"/>
-          </a:p>
-        </p:txBody>
-      </p:sp>
-      <p:sp>
-        <p:nvSpPr>
-          <p:cNvPr id="16" name="Text 12"/>
-          <p:cNvSpPr/>
-          <p:nvPr/>
-        </p:nvSpPr>
-        <p:spPr>
-          <a:xfrm>
-            <a:off x="868680" y="5879592"/>
-            <a:ext cx="9784080" cy="347472"/>
-          </a:xfrm>
-          <a:prstGeom prst="rect">
-            <a:avLst/>
-          </a:prstGeom>
-          <a:noFill/>
-          <a:ln/>
-        </p:spPr>
-        <p:txBody>
-          <a:bodyPr wrap="square" lIns="635" tIns="635" rIns="635" bIns="635" rtlCol="0" anchor="ctr">
-            <a:normAutofit fontScale="85000" lnSpcReduction="20000"/>
-          </a:bodyPr>
-          <a:lstStyle/>
-          <a:p>
-            <a:pPr marL="0" indent="0">
-              <a:buNone/>
-            </a:pPr>
-            <a:r>
-              <a:rPr lang="en-US" sz="1500" b="1" dirty="0">
-                <a:solidFill>
-                  <a:srgbClr val="142033"/>
-                </a:solidFill>
-                <a:latin typeface="Aptos" pitchFamily="34" charset="0"/>
-                <a:ea typeface="Aptos" pitchFamily="34" charset="-122"/>
-                <a:cs typeface="Aptos" pitchFamily="34" charset="-120"/>
-              </a:rPr>
-              <a:t>SAM is slightly more accurate; STT-B is much faster. This is exactly the project question: not a universal winner, but a useful trade-off.</a:t>
-            </a:r>
-            <a:endParaRPr lang="en-US" sz="1500" dirty="0"/>
-          </a:p>
-        </p:txBody>
-      </p:sp>
-    </p:spTree>
-  </p:cSld>
-  <p:clrMapOvr>
-    <a:masterClrMapping/>
-  </p:clrMapOvr>
-</p:sld>
-</file>
-
-<file path=ppt/slides/slide9.xml><?xml version="1.0" encoding="utf-8"?>
-<p:sld xmlns:a="http://schemas.openxmlformats.org/drawingml/2006/main" xmlns:r="http://schemas.openxmlformats.org/officeDocument/2006/relationships" xmlns:p="http://schemas.openxmlformats.org/presentationml/2006/main">
-  <p:cSld name="Slide 9">
-    <p:bg>
-      <p:bgPr>
-        <a:solidFill>
-          <a:srgbClr val="FFFFFF"/>
-        </a:solidFill>
-        <a:effectLst/>
-      </p:bgPr>
-    </p:bg>
-    <p:spTree>
-      <p:nvGrpSpPr>
-        <p:cNvPr id="1" name=""/>
-        <p:cNvGrpSpPr/>
-        <p:nvPr/>
-      </p:nvGrpSpPr>
-      <p:grpSpPr>
-        <a:xfrm>
-          <a:off x="0" y="0"/>
-          <a:ext cx="0" cy="0"/>
-          <a:chOff x="0" y="0"/>
-          <a:chExt cx="0" cy="0"/>
-        </a:xfrm>
-      </p:grpSpPr>
-      <p:sp>
-        <p:nvSpPr>
-          <p:cNvPr id="2" name="Shape 0"/>
-          <p:cNvSpPr/>
-          <p:nvPr/>
-        </p:nvSpPr>
-        <p:spPr>
-          <a:xfrm>
-            <a:off x="0" y="0"/>
-            <a:ext cx="12191695" cy="128016"/>
-          </a:xfrm>
-          <a:prstGeom prst="rect">
-            <a:avLst/>
-          </a:prstGeom>
-          <a:solidFill>
-            <a:srgbClr val="2D6F91"/>
-          </a:solidFill>
-          <a:ln w="12700">
-            <a:solidFill>
-              <a:srgbClr val="2D6F91">
-                <a:alpha val="0"/>
-              </a:srgbClr>
-            </a:solidFill>
-            <a:prstDash val="solid"/>
-          </a:ln>
-        </p:spPr>
-      </p:sp>
-      <p:sp>
-        <p:nvSpPr>
-          <p:cNvPr id="3" name="Text 1"/>
-          <p:cNvSpPr/>
-          <p:nvPr/>
-        </p:nvSpPr>
-        <p:spPr>
-          <a:xfrm>
-            <a:off x="502920" y="329184"/>
-            <a:ext cx="5303520" cy="201168"/>
-          </a:xfrm>
-          <a:prstGeom prst="rect">
-            <a:avLst/>
-          </a:prstGeom>
-          <a:noFill/>
-          <a:ln/>
-        </p:spPr>
-        <p:txBody>
-          <a:bodyPr wrap="square" lIns="0" tIns="0" rIns="0" bIns="0" rtlCol="0" anchor="ctr"/>
-          <a:lstStyle/>
-          <a:p>
-            <a:pPr marL="0" indent="0">
-              <a:buNone/>
-            </a:pPr>
-            <a:r>
-              <a:rPr lang="en-US" sz="800" b="1" dirty="0">
-                <a:solidFill>
-                  <a:srgbClr val="2D6F91"/>
-                </a:solidFill>
-                <a:latin typeface="Aptos" pitchFamily="34" charset="0"/>
-                <a:ea typeface="Aptos" pitchFamily="34" charset="-122"/>
-                <a:cs typeface="Aptos" pitchFamily="34" charset="-120"/>
-              </a:rPr>
-              <a:t>08 • PROMPT SENSITIVITY</a:t>
-            </a:r>
-            <a:endParaRPr lang="en-US" sz="800" dirty="0"/>
-          </a:p>
-        </p:txBody>
-      </p:sp>
-      <p:sp>
-        <p:nvSpPr>
-          <p:cNvPr id="4" name="Text 2"/>
-          <p:cNvSpPr/>
-          <p:nvPr/>
-        </p:nvSpPr>
-        <p:spPr>
-          <a:xfrm>
-            <a:off x="502920" y="658368"/>
-            <a:ext cx="7772400" cy="502920"/>
-          </a:xfrm>
-          <a:prstGeom prst="rect">
-            <a:avLst/>
-          </a:prstGeom>
-          <a:noFill/>
-          <a:ln/>
-        </p:spPr>
-        <p:txBody>
-          <a:bodyPr wrap="square" lIns="0" tIns="0" rIns="0" bIns="0" rtlCol="0" anchor="ctr"/>
-          <a:lstStyle/>
-          <a:p>
-            <a:pPr marL="0" indent="0">
-              <a:buNone/>
-            </a:pPr>
-            <a:r>
-              <a:rPr lang="en-US" sz="2700" b="1" dirty="0">
-                <a:solidFill>
-                  <a:srgbClr val="142033"/>
-                </a:solidFill>
-                <a:latin typeface="Aptos Display" pitchFamily="34" charset="0"/>
-                <a:ea typeface="Aptos Display" pitchFamily="34" charset="-122"/>
-                <a:cs typeface="Aptos Display" pitchFamily="34" charset="-120"/>
-              </a:rPr>
-              <a:t>The user click is part of the system</a:t>
-            </a:r>
-            <a:endParaRPr lang="en-US" sz="2700" dirty="0"/>
-          </a:p>
-        </p:txBody>
-      </p:sp>
-      <p:sp>
-        <p:nvSpPr>
-          <p:cNvPr id="5" name="Shape 3"/>
-          <p:cNvSpPr/>
-          <p:nvPr/>
-        </p:nvSpPr>
-        <p:spPr>
-          <a:xfrm>
-            <a:off x="502920" y="1261872"/>
-            <a:ext cx="960120" cy="0"/>
-          </a:xfrm>
-          <a:prstGeom prst="line">
-            <a:avLst/>
-          </a:prstGeom>
-          <a:noFill/>
-          <a:ln w="50800">
-            <a:solidFill>
-              <a:srgbClr val="64A6BD"/>
-            </a:solidFill>
-            <a:prstDash val="solid"/>
-          </a:ln>
-        </p:spPr>
-      </p:sp>
-      <p:pic>
-        <p:nvPicPr>
-          <p:cNvPr id="6" name="Image 0" descr="/mnt/data/cvdl_extract/cv_dl project/prompt_robustness_iou.png"/>
-          <p:cNvPicPr>
-            <a:picLocks noChangeAspect="1"/>
-          </p:cNvPicPr>
-          <p:nvPr/>
-        </p:nvPicPr>
-        <p:blipFill>
-          <a:blip r:embed="rId3"/>
-          <a:stretch>
-            <a:fillRect/>
-          </a:stretch>
-        </p:blipFill>
-        <p:spPr>
-          <a:xfrm>
-            <a:off x="731520" y="2034540"/>
-            <a:ext cx="5212080" cy="2606040"/>
-          </a:xfrm>
-          <a:prstGeom prst="rect">
-            <a:avLst/>
-          </a:prstGeom>
-        </p:spPr>
-      </p:pic>
-      <p:sp>
-        <p:nvSpPr>
-          <p:cNvPr id="7" name="Text 4"/>
-          <p:cNvSpPr/>
-          <p:nvPr/>
-        </p:nvSpPr>
-        <p:spPr>
-          <a:xfrm>
-            <a:off x="6492240" y="1737360"/>
-            <a:ext cx="2743200" cy="182880"/>
-          </a:xfrm>
-          <a:prstGeom prst="rect">
-            <a:avLst/>
-          </a:prstGeom>
-          <a:noFill/>
-          <a:ln/>
-        </p:spPr>
-        <p:txBody>
-          <a:bodyPr wrap="square" lIns="0" tIns="0" rIns="0" bIns="0" rtlCol="0" anchor="ctr"/>
-          <a:lstStyle/>
-          <a:p>
-            <a:pPr marL="0" indent="0">
-              <a:buNone/>
-            </a:pPr>
-            <a:r>
-              <a:rPr lang="en-US" sz="800" b="1" dirty="0">
-                <a:solidFill>
-                  <a:srgbClr val="2D6F91"/>
-                </a:solidFill>
-                <a:latin typeface="Aptos" pitchFamily="34" charset="0"/>
-                <a:ea typeface="Aptos" pitchFamily="34" charset="-122"/>
-                <a:cs typeface="Aptos" pitchFamily="34" charset="-120"/>
-              </a:rPr>
-              <a:t>ABLATION RESULT</a:t>
-            </a:r>
-            <a:endParaRPr lang="en-US" sz="800" dirty="0"/>
-          </a:p>
-        </p:txBody>
-      </p:sp>
-      <p:sp>
-        <p:nvSpPr>
-          <p:cNvPr id="8" name="Text 5"/>
-          <p:cNvSpPr/>
-          <p:nvPr/>
-        </p:nvSpPr>
-        <p:spPr>
-          <a:xfrm>
-            <a:off x="6492240" y="2057400"/>
-            <a:ext cx="4206240" cy="1737360"/>
-          </a:xfrm>
-          <a:prstGeom prst="rect">
-            <a:avLst/>
-          </a:prstGeom>
-          <a:noFill/>
-          <a:ln/>
-        </p:spPr>
-        <p:txBody>
-          <a:bodyPr wrap="square" lIns="508" tIns="508" rIns="508" bIns="508" rtlCol="0" anchor="ctr">
-            <a:normAutofit/>
-          </a:bodyPr>
-          <a:lstStyle/>
-          <a:p>
-            <a:pPr marL="0" indent="0">
-              <a:buNone/>
-            </a:pPr>
-            <a:r>
-              <a:rPr lang="en-US" sz="1500" dirty="0">
-                <a:solidFill>
-                  <a:srgbClr val="142033"/>
-                </a:solidFill>
-                <a:latin typeface="Aptos" pitchFamily="34" charset="0"/>
-                <a:ea typeface="Aptos" pitchFamily="34" charset="-122"/>
-                <a:cs typeface="Aptos" pitchFamily="34" charset="-120"/>
-              </a:rPr>
-              <a:t>• Centroid prompt: IoU 0.650 — strongest in this ablation.
-• Deepest interior: 0.616.
-• Random and boundary: ≈0.532 each.
-• Point location materially changes segmentation quality.</a:t>
-            </a:r>
-            <a:endParaRPr lang="en-US" sz="1500" dirty="0"/>
-          </a:p>
-        </p:txBody>
-      </p:sp>
-      <p:sp>
-        <p:nvSpPr>
-          <p:cNvPr id="9" name="Text 6"/>
-          <p:cNvSpPr/>
-          <p:nvPr/>
-        </p:nvSpPr>
-        <p:spPr>
-          <a:xfrm>
-            <a:off x="6492240" y="4663440"/>
-            <a:ext cx="4114800" cy="594360"/>
-          </a:xfrm>
-          <a:prstGeom prst="rect">
-            <a:avLst/>
-          </a:prstGeom>
-          <a:noFill/>
-          <a:ln/>
-        </p:spPr>
-        <p:txBody>
-          <a:bodyPr wrap="square" lIns="635" tIns="635" rIns="635" bIns="635" rtlCol="0" anchor="ctr">
-            <a:normAutofit fontScale="85000" lnSpcReduction="10000"/>
-          </a:bodyPr>
-          <a:lstStyle/>
-          <a:p>
-            <a:pPr marL="0" indent="0">
-              <a:buNone/>
-            </a:pPr>
-            <a:r>
-              <a:rPr lang="en-US" sz="1800" b="1" dirty="0">
-                <a:solidFill>
-                  <a:srgbClr val="142033"/>
-                </a:solidFill>
-                <a:latin typeface="Aptos" pitchFamily="34" charset="0"/>
-                <a:ea typeface="Aptos" pitchFamily="34" charset="-122"/>
-                <a:cs typeface="Aptos" pitchFamily="34" charset="-120"/>
-              </a:rPr>
-              <a:t>Why this belongs in the project: real interactive systems depend on users, not just architecture.</a:t>
-            </a:r>
-            <a:endParaRPr lang="en-US" sz="1800" dirty="0"/>
           </a:p>
         </p:txBody>
       </p:sp>
